--- a/evaluation/experiments/meta_v3_3/final_results/ptfkit_benchmark_summary.pptx
+++ b/evaluation/experiments/meta_v3_3/final_results/ptfkit_benchmark_summary.pptx
@@ -7,6 +7,7 @@
   <p:sldIdLst>
     <p:sldId id="256" r:id="rId2"/>
     <p:sldId id="257" r:id="rId3"/>
+    <p:sldId id="258" r:id="rId4"/>
   </p:sldIdLst>
   <p:sldSz cx="12192000" cy="6858000"/>
   <p:notesSz cx="6858000" cy="9144000"/>
@@ -3107,8 +3108,8 @@
         </p:nvSpPr>
         <p:spPr>
           <a:xfrm>
-            <a:off x="365760" y="201168"/>
-            <a:ext cx="11430000" cy="457200"/>
+            <a:off x="411480" y="228600"/>
+            <a:ext cx="11338560" cy="502920"/>
           </a:xfrm>
           <a:prstGeom prst="rect">
             <a:avLst/>
@@ -3116,63 +3117,24 @@
           <a:noFill/>
         </p:spPr>
         <p:txBody>
-          <a:bodyPr wrap="square" lIns="18288" tIns="9144" rIns="18288" bIns="9144">
+          <a:bodyPr wrap="square" lIns="13716" tIns="4572" rIns="13716" bIns="4572">
             <a:spAutoFit/>
           </a:bodyPr>
           <a:lstStyle/>
           <a:p>
             <a:pPr>
               <a:spcAft>
-                <a:spcPts val="300"/>
-              </a:spcAft>
-              <a:defRPr sz="2500" b="1">
-                <a:solidFill>
-                  <a:srgbClr val="253746"/>
-                </a:solidFill>
-                <a:latin typeface="Aptos"/>
-              </a:defRPr>
-            </a:pPr>
-            <a:r>
-              <a:t>Выбор педотрансферных функций для ОГХ и Ksat</a:t>
-            </a:r>
-          </a:p>
-        </p:txBody>
-      </p:sp>
-      <p:sp>
-        <p:nvSpPr>
-          <p:cNvPr id="3" name="TextBox 2"/>
-          <p:cNvSpPr txBox="1"/>
-          <p:nvPr/>
-        </p:nvSpPr>
-        <p:spPr>
-          <a:xfrm>
-            <a:off x="365760" y="6528816"/>
-            <a:ext cx="10972800" cy="182880"/>
-          </a:xfrm>
-          <a:prstGeom prst="rect">
-            <a:avLst/>
-          </a:prstGeom>
-          <a:noFill/>
-        </p:spPr>
-        <p:txBody>
-          <a:bodyPr wrap="square" lIns="18288" tIns="9144" rIns="18288" bIns="9144">
-            <a:spAutoFit/>
-          </a:bodyPr>
-          <a:lstStyle/>
-          <a:p>
-            <a:pPr>
-              <a:spcAft>
-                <a:spcPts val="300"/>
-              </a:spcAft>
-              <a:defRPr sz="900" b="0">
-                <a:solidFill>
-                  <a:srgbClr val="657782"/>
-                </a:solidFill>
-                <a:latin typeface="Aptos"/>
-              </a:defRPr>
-            </a:pPr>
-            <a:r>
-              <a:t>Exploratory benchmark, meta_v3.3; results are dataset-specific.</a:t>
+                <a:spcPts val="200"/>
+              </a:spcAft>
+              <a:defRPr sz="2700" b="1">
+                <a:solidFill>
+                  <a:srgbClr val="193447"/>
+                </a:solidFill>
+                <a:latin typeface="Arial"/>
+              </a:defRPr>
+            </a:pPr>
+            <a:r>
+              <a:t>Сравнение педотрансферных функций для ОГХ и Ksat</a:t>
             </a:r>
           </a:p>
         </p:txBody>
@@ -3185,8 +3147,8 @@
         </p:nvSpPr>
         <p:spPr>
           <a:xfrm>
-            <a:off x="11430000" y="6528816"/>
-            <a:ext cx="274320" cy="182880"/>
+            <a:off x="11338560" y="6510528"/>
+            <a:ext cx="365760" cy="228600"/>
           </a:xfrm>
           <a:prstGeom prst="rect">
             <a:avLst/>
@@ -3194,20 +3156,20 @@
           <a:noFill/>
         </p:spPr>
         <p:txBody>
-          <a:bodyPr wrap="square" lIns="18288" tIns="9144" rIns="18288" bIns="9144">
+          <a:bodyPr wrap="square" lIns="13716" tIns="4572" rIns="13716" bIns="4572">
             <a:spAutoFit/>
           </a:bodyPr>
           <a:lstStyle/>
           <a:p>
             <a:pPr>
               <a:spcAft>
-                <a:spcPts val="300"/>
-              </a:spcAft>
-              <a:defRPr sz="900" b="0">
-                <a:solidFill>
-                  <a:srgbClr val="657782"/>
-                </a:solidFill>
-                <a:latin typeface="Aptos"/>
+                <a:spcPts val="200"/>
+              </a:spcAft>
+              <a:defRPr sz="1100" b="0">
+                <a:solidFill>
+                  <a:srgbClr val="627482"/>
+                </a:solidFill>
+                <a:latin typeface="Arial"/>
               </a:defRPr>
             </a:pPr>
             <a:r>
@@ -3218,157 +3180,139 @@
       </p:sp>
       <p:sp>
         <p:nvSpPr>
-          <p:cNvPr id="5" name="TextBox 4"/>
-          <p:cNvSpPr txBox="1"/>
-          <p:nvPr/>
-        </p:nvSpPr>
-        <p:spPr>
-          <a:xfrm>
-            <a:off x="384048" y="740664"/>
-            <a:ext cx="11338560" cy="274320"/>
-          </a:xfrm>
-          <a:prstGeom prst="rect">
-            <a:avLst/>
-          </a:prstGeom>
-          <a:noFill/>
-        </p:spPr>
-        <p:txBody>
-          <a:bodyPr wrap="square" lIns="18288" tIns="9144" rIns="18288" bIns="9144">
-            <a:spAutoFit/>
-          </a:bodyPr>
-          <a:lstStyle/>
-          <a:p>
-            <a:pPr>
-              <a:spcAft>
-                <a:spcPts val="300"/>
-              </a:spcAft>
-              <a:defRPr sz="1200" b="0">
-                <a:solidFill>
-                  <a:srgbClr val="253746"/>
-                </a:solidFill>
-                <a:latin typeface="Aptos"/>
-              </a:defRPr>
-            </a:pPr>
-            <a:r>
-              <a:t>Ledger: 1,701 WRC points / 142 samples; 39 Ksat observations. Comparison cohorts are shown separately.</a:t>
-            </a:r>
-          </a:p>
-        </p:txBody>
-      </p:sp>
-      <p:sp>
-        <p:nvSpPr>
-          <p:cNvPr id="6" name="TextBox 5"/>
-          <p:cNvSpPr txBox="1"/>
-          <p:nvPr/>
-        </p:nvSpPr>
-        <p:spPr>
-          <a:xfrm>
-            <a:off x="411480" y="1115568"/>
-            <a:ext cx="2788920" cy="228600"/>
-          </a:xfrm>
-          <a:prstGeom prst="rect">
-            <a:avLst/>
-          </a:prstGeom>
-          <a:noFill/>
-        </p:spPr>
-        <p:txBody>
-          <a:bodyPr wrap="square" lIns="18288" tIns="9144" rIns="18288" bIns="9144">
-            <a:spAutoFit/>
-          </a:bodyPr>
-          <a:lstStyle/>
-          <a:p>
-            <a:pPr>
-              <a:spcAft>
-                <a:spcPts val="300"/>
-              </a:spcAft>
-              <a:defRPr sz="1100" b="0">
-                <a:solidFill>
-                  <a:srgbClr val="657782"/>
-                </a:solidFill>
-                <a:latin typeface="Aptos"/>
-              </a:defRPr>
-            </a:pPr>
-            <a:r>
-              <a:t>Volumetric WRC</a:t>
-            </a:r>
-          </a:p>
-        </p:txBody>
-      </p:sp>
-      <p:sp>
-        <p:nvSpPr>
-          <p:cNvPr id="7" name="TextBox 6"/>
-          <p:cNvSpPr txBox="1"/>
-          <p:nvPr/>
-        </p:nvSpPr>
-        <p:spPr>
-          <a:xfrm>
-            <a:off x="411480" y="1353312"/>
-            <a:ext cx="2788920" cy="393192"/>
-          </a:xfrm>
-          <a:prstGeom prst="rect">
-            <a:avLst/>
-          </a:prstGeom>
-          <a:noFill/>
-        </p:spPr>
-        <p:txBody>
-          <a:bodyPr wrap="square" lIns="18288" tIns="9144" rIns="18288" bIns="9144">
-            <a:spAutoFit/>
-          </a:bodyPr>
-          <a:lstStyle/>
-          <a:p>
-            <a:pPr>
-              <a:spcAft>
-                <a:spcPts val="300"/>
-              </a:spcAft>
-              <a:defRPr sz="2700" b="1">
-                <a:solidFill>
-                  <a:srgbClr val="16766D"/>
-                </a:solidFill>
-                <a:latin typeface="Aptos"/>
-              </a:defRPr>
-            </a:pPr>
-            <a:r>
-              <a:t>0.0421</a:t>
-            </a:r>
-          </a:p>
-        </p:txBody>
-      </p:sp>
-      <p:sp>
-        <p:nvSpPr>
-          <p:cNvPr id="8" name="TextBox 7"/>
-          <p:cNvSpPr txBox="1"/>
-          <p:nvPr/>
-        </p:nvSpPr>
-        <p:spPr>
-          <a:xfrm>
-            <a:off x="411480" y="1792224"/>
-            <a:ext cx="2788920" cy="347472"/>
-          </a:xfrm>
-          <a:prstGeom prst="rect">
-            <a:avLst/>
-          </a:prstGeom>
-          <a:noFill/>
-        </p:spPr>
-        <p:txBody>
-          <a:bodyPr wrap="square" lIns="18288" tIns="9144" rIns="18288" bIns="9144">
-            <a:spAutoFit/>
-          </a:bodyPr>
-          <a:lstStyle/>
-          <a:p>
-            <a:pPr>
-              <a:spcAft>
-                <a:spcPts val="300"/>
-              </a:spcAft>
-              <a:defRPr sz="1000" b="0">
-                <a:solidFill>
-                  <a:srgbClr val="253746"/>
-                </a:solidFill>
-                <a:latin typeface="Aptos"/>
-              </a:defRPr>
-            </a:pPr>
-            <a:r>
-              <a:t>Varallyai chernozem B · N=17</a:t>
-            </a:r>
+          <p:cNvPr id="6" name="Rounded Rectangle 5"/>
+          <p:cNvSpPr/>
+          <p:nvPr/>
+        </p:nvSpPr>
+        <p:spPr>
+          <a:xfrm>
+            <a:off x="411480" y="1325880"/>
+            <a:ext cx="3685032" cy="4526280"/>
+          </a:xfrm>
+          <a:prstGeom prst="roundRect">
+            <a:avLst>
+              <a:gd name="adj" fmla="val 8000"/>
+            </a:avLst>
+          </a:prstGeom>
+          <a:solidFill>
+            <a:srgbClr val="F0F6F7"/>
+          </a:solidFill>
+          <a:ln>
+            <a:noFill/>
+          </a:ln>
+        </p:spPr>
+        <p:style>
+          <a:lnRef idx="1">
+            <a:schemeClr val="accent1"/>
+          </a:lnRef>
+          <a:fillRef idx="3">
+            <a:schemeClr val="accent1"/>
+          </a:fillRef>
+          <a:effectRef idx="2">
+            <a:schemeClr val="accent1"/>
+          </a:effectRef>
+          <a:fontRef idx="minor">
+            <a:schemeClr val="lt1"/>
+          </a:fontRef>
+        </p:style>
+        <p:txBody>
+          <a:bodyPr rtlCol="0" anchor="ctr"/>
+          <a:lstStyle/>
+          <a:p>
+            <a:pPr algn="ctr"/>
+            <a:endParaRPr/>
+          </a:p>
+        </p:txBody>
+      </p:sp>
+      <p:sp>
+        <p:nvSpPr>
+          <p:cNvPr id="7" name="Rounded Rectangle 6"/>
+          <p:cNvSpPr/>
+          <p:nvPr/>
+        </p:nvSpPr>
+        <p:spPr>
+          <a:xfrm>
+            <a:off x="4251960" y="1325880"/>
+            <a:ext cx="3685032" cy="4526280"/>
+          </a:xfrm>
+          <a:prstGeom prst="roundRect">
+            <a:avLst>
+              <a:gd name="adj" fmla="val 8000"/>
+            </a:avLst>
+          </a:prstGeom>
+          <a:solidFill>
+            <a:srgbClr val="F0F6F7"/>
+          </a:solidFill>
+          <a:ln>
+            <a:noFill/>
+          </a:ln>
+        </p:spPr>
+        <p:style>
+          <a:lnRef idx="1">
+            <a:schemeClr val="accent1"/>
+          </a:lnRef>
+          <a:fillRef idx="3">
+            <a:schemeClr val="accent1"/>
+          </a:fillRef>
+          <a:effectRef idx="2">
+            <a:schemeClr val="accent1"/>
+          </a:effectRef>
+          <a:fontRef idx="minor">
+            <a:schemeClr val="lt1"/>
+          </a:fontRef>
+        </p:style>
+        <p:txBody>
+          <a:bodyPr rtlCol="0" anchor="ctr"/>
+          <a:lstStyle/>
+          <a:p>
+            <a:pPr algn="ctr"/>
+            <a:endParaRPr/>
+          </a:p>
+        </p:txBody>
+      </p:sp>
+      <p:sp>
+        <p:nvSpPr>
+          <p:cNvPr id="8" name="Rounded Rectangle 7"/>
+          <p:cNvSpPr/>
+          <p:nvPr/>
+        </p:nvSpPr>
+        <p:spPr>
+          <a:xfrm>
+            <a:off x="8065008" y="1339342"/>
+            <a:ext cx="3685032" cy="4526280"/>
+          </a:xfrm>
+          <a:prstGeom prst="roundRect">
+            <a:avLst>
+              <a:gd name="adj" fmla="val 8000"/>
+            </a:avLst>
+          </a:prstGeom>
+          <a:solidFill>
+            <a:srgbClr val="F0F6F7"/>
+          </a:solidFill>
+          <a:ln>
+            <a:noFill/>
+          </a:ln>
+        </p:spPr>
+        <p:style>
+          <a:lnRef idx="1">
+            <a:schemeClr val="accent1"/>
+          </a:lnRef>
+          <a:fillRef idx="3">
+            <a:schemeClr val="accent1"/>
+          </a:fillRef>
+          <a:effectRef idx="2">
+            <a:schemeClr val="accent1"/>
+          </a:effectRef>
+          <a:fontRef idx="minor">
+            <a:schemeClr val="lt1"/>
+          </a:fontRef>
+        </p:style>
+        <p:txBody>
+          <a:bodyPr rtlCol="0" anchor="ctr"/>
+          <a:lstStyle/>
+          <a:p>
+            <a:pPr algn="ctr"/>
+            <a:endParaRPr/>
           </a:p>
         </p:txBody>
       </p:sp>
@@ -3380,8 +3324,8 @@
         </p:nvSpPr>
         <p:spPr>
           <a:xfrm>
-            <a:off x="3337560" y="1115568"/>
-            <a:ext cx="2788920" cy="228600"/>
+            <a:off x="621792" y="1508760"/>
+            <a:ext cx="3291840" cy="366268"/>
           </a:xfrm>
           <a:prstGeom prst="rect">
             <a:avLst/>
@@ -3389,24 +3333,24 @@
           <a:noFill/>
         </p:spPr>
         <p:txBody>
-          <a:bodyPr wrap="square" lIns="18288" tIns="9144" rIns="18288" bIns="9144">
+          <a:bodyPr wrap="square" lIns="13716" tIns="4572" rIns="13716" bIns="4572">
             <a:spAutoFit/>
           </a:bodyPr>
           <a:lstStyle/>
           <a:p>
             <a:pPr>
               <a:spcAft>
-                <a:spcPts val="300"/>
-              </a:spcAft>
-              <a:defRPr sz="1100" b="0">
-                <a:solidFill>
-                  <a:srgbClr val="657782"/>
-                </a:solidFill>
-                <a:latin typeface="Aptos"/>
-              </a:defRPr>
-            </a:pPr>
-            <a:r>
-              <a:t>Gravimetric WRC</a:t>
+                <a:spcPts val="200"/>
+              </a:spcAft>
+              <a:defRPr sz="2200" b="1">
+                <a:solidFill>
+                  <a:srgbClr val="193447"/>
+                </a:solidFill>
+                <a:latin typeface="Arial"/>
+              </a:defRPr>
+            </a:pPr>
+            <a:r>
+              <a:t>Объёмная ОГХ</a:t>
             </a:r>
           </a:p>
         </p:txBody>
@@ -3419,8 +3363,8 @@
         </p:nvSpPr>
         <p:spPr>
           <a:xfrm>
-            <a:off x="3337560" y="1353312"/>
-            <a:ext cx="2788920" cy="393192"/>
+            <a:off x="621792" y="1956816"/>
+            <a:ext cx="3291840" cy="608584"/>
           </a:xfrm>
           <a:prstGeom prst="rect">
             <a:avLst/>
@@ -3428,24 +3372,40 @@
           <a:noFill/>
         </p:spPr>
         <p:txBody>
-          <a:bodyPr wrap="square" lIns="18288" tIns="9144" rIns="18288" bIns="9144">
+          <a:bodyPr wrap="square" lIns="13716" tIns="4572" rIns="13716" bIns="4572">
             <a:spAutoFit/>
           </a:bodyPr>
           <a:lstStyle/>
           <a:p>
             <a:pPr>
               <a:spcAft>
-                <a:spcPts val="300"/>
-              </a:spcAft>
-              <a:defRPr sz="2700" b="1">
-                <a:solidFill>
-                  <a:srgbClr val="16766D"/>
-                </a:solidFill>
-                <a:latin typeface="Aptos"/>
-              </a:defRPr>
-            </a:pPr>
-            <a:r>
-              <a:t>0.0899</a:t>
+                <a:spcPts val="200"/>
+              </a:spcAft>
+              <a:defRPr sz="1800" b="0">
+                <a:solidFill>
+                  <a:srgbClr val="193447"/>
+                </a:solidFill>
+                <a:latin typeface="Arial"/>
+              </a:defRPr>
+            </a:pPr>
+            <a:r>
+              <a:t>Varallyai1982</a:t>
+            </a:r>
+          </a:p>
+          <a:p>
+            <a:pPr>
+              <a:spcAft>
+                <a:spcPts val="200"/>
+              </a:spcAft>
+              <a:defRPr sz="1800" b="0">
+                <a:solidFill>
+                  <a:srgbClr val="193447"/>
+                </a:solidFill>
+                <a:latin typeface="Arial"/>
+              </a:defRPr>
+            </a:pPr>
+            <a:r>
+              <a:t>chernozem B</a:t>
             </a:r>
           </a:p>
         </p:txBody>
@@ -3458,8 +3418,8 @@
         </p:nvSpPr>
         <p:spPr>
           <a:xfrm>
-            <a:off x="3337560" y="1792224"/>
-            <a:ext cx="2788920" cy="347472"/>
+            <a:off x="621792" y="2624328"/>
+            <a:ext cx="3291840" cy="490220"/>
           </a:xfrm>
           <a:prstGeom prst="rect">
             <a:avLst/>
@@ -3467,24 +3427,24 @@
           <a:noFill/>
         </p:spPr>
         <p:txBody>
-          <a:bodyPr wrap="square" lIns="18288" tIns="9144" rIns="18288" bIns="9144">
+          <a:bodyPr wrap="square" lIns="13716" tIns="4572" rIns="13716" bIns="4572">
             <a:spAutoFit/>
           </a:bodyPr>
           <a:lstStyle/>
           <a:p>
             <a:pPr>
               <a:spcAft>
-                <a:spcPts val="300"/>
-              </a:spcAft>
-              <a:defRPr sz="1000" b="0">
-                <a:solidFill>
-                  <a:srgbClr val="253746"/>
-                </a:solidFill>
-                <a:latin typeface="Aptos"/>
-              </a:defRPr>
-            </a:pPr>
-            <a:r>
-              <a:t>Chakraborty eq4 · N=8</a:t>
+                <a:spcPts val="200"/>
+              </a:spcAft>
+              <a:defRPr sz="3000" b="1">
+                <a:solidFill>
+                  <a:srgbClr val="193447"/>
+                </a:solidFill>
+                <a:latin typeface="Arial"/>
+              </a:defRPr>
+            </a:pPr>
+            <a:r>
+              <a:t>0.036778</a:t>
             </a:r>
           </a:p>
         </p:txBody>
@@ -3497,8 +3457,8 @@
         </p:nvSpPr>
         <p:spPr>
           <a:xfrm>
-            <a:off x="6263640" y="1115568"/>
-            <a:ext cx="2788920" cy="228600"/>
+            <a:off x="621792" y="3136392"/>
+            <a:ext cx="3291840" cy="292608"/>
           </a:xfrm>
           <a:prstGeom prst="rect">
             <a:avLst/>
@@ -3506,25 +3466,39 @@
           <a:noFill/>
         </p:spPr>
         <p:txBody>
-          <a:bodyPr wrap="square" lIns="18288" tIns="9144" rIns="18288" bIns="9144">
+          <a:bodyPr wrap="square" lIns="13716" tIns="4572" rIns="13716" bIns="4572">
             <a:spAutoFit/>
           </a:bodyPr>
           <a:lstStyle/>
           <a:p>
             <a:pPr>
               <a:spcAft>
-                <a:spcPts val="300"/>
-              </a:spcAft>
-              <a:defRPr sz="1100" b="0">
-                <a:solidFill>
-                  <a:srgbClr val="657782"/>
-                </a:solidFill>
-                <a:latin typeface="Aptos"/>
-              </a:defRPr>
-            </a:pPr>
-            <a:r>
-              <a:t>Ksat, maximum coverage</a:t>
-            </a:r>
+                <a:spcPts val="200"/>
+              </a:spcAft>
+              <a:defRPr sz="1300" b="0">
+                <a:solidFill>
+                  <a:srgbClr val="627482"/>
+                </a:solidFill>
+                <a:latin typeface="Arial"/>
+              </a:defRPr>
+            </a:pPr>
+            <a:r>
+              <a:rPr dirty="0"/>
+              <a:t>RMSE, м³/м³ • 15 </a:t>
+            </a:r>
+            <a:r>
+              <a:rPr dirty="0" err="1"/>
+              <a:t>образцов</a:t>
+            </a:r>
+            <a:r>
+              <a:rPr dirty="0"/>
+              <a:t> / 136 </a:t>
+            </a:r>
+            <a:r>
+              <a:rPr dirty="0" err="1"/>
+              <a:t>точек</a:t>
+            </a:r>
+            <a:endParaRPr dirty="0"/>
           </a:p>
         </p:txBody>
       </p:sp>
@@ -3536,8 +3510,8 @@
         </p:nvSpPr>
         <p:spPr>
           <a:xfrm>
-            <a:off x="6263640" y="1353312"/>
-            <a:ext cx="2788920" cy="393192"/>
+            <a:off x="621792" y="3675887"/>
+            <a:ext cx="3383280" cy="320040"/>
           </a:xfrm>
           <a:prstGeom prst="rect">
             <a:avLst/>
@@ -3545,24 +3519,24 @@
           <a:noFill/>
         </p:spPr>
         <p:txBody>
-          <a:bodyPr wrap="square" lIns="18288" tIns="9144" rIns="18288" bIns="9144">
+          <a:bodyPr wrap="square" lIns="13716" tIns="4572" rIns="13716" bIns="4572">
             <a:spAutoFit/>
           </a:bodyPr>
           <a:lstStyle/>
           <a:p>
             <a:pPr>
               <a:spcAft>
-                <a:spcPts val="300"/>
-              </a:spcAft>
-              <a:defRPr sz="2700" b="1">
-                <a:solidFill>
-                  <a:srgbClr val="16766D"/>
-                </a:solidFill>
-                <a:latin typeface="Aptos"/>
-              </a:defRPr>
-            </a:pPr>
-            <a:r>
-              <a:t>0.718</a:t>
+                <a:spcPts val="200"/>
+              </a:spcAft>
+              <a:defRPr sz="1700" b="1">
+                <a:solidFill>
+                  <a:srgbClr val="087F79"/>
+                </a:solidFill>
+                <a:latin typeface="Arial"/>
+              </a:defRPr>
+            </a:pPr>
+            <a:r>
+              <a:t>Ансамбль top-5 • равные веса</a:t>
             </a:r>
           </a:p>
         </p:txBody>
@@ -3575,8 +3549,8 @@
         </p:nvSpPr>
         <p:spPr>
           <a:xfrm>
-            <a:off x="6263640" y="1792224"/>
-            <a:ext cx="2788920" cy="347472"/>
+            <a:off x="621792" y="4087368"/>
+            <a:ext cx="2148840" cy="490220"/>
           </a:xfrm>
           <a:prstGeom prst="rect">
             <a:avLst/>
@@ -3584,24 +3558,24 @@
           <a:noFill/>
         </p:spPr>
         <p:txBody>
-          <a:bodyPr wrap="square" lIns="18288" tIns="9144" rIns="18288" bIns="9144">
+          <a:bodyPr wrap="square" lIns="13716" tIns="4572" rIns="13716" bIns="4572">
             <a:spAutoFit/>
           </a:bodyPr>
           <a:lstStyle/>
           <a:p>
             <a:pPr>
               <a:spcAft>
-                <a:spcPts val="300"/>
-              </a:spcAft>
-              <a:defRPr sz="1000" b="0">
-                <a:solidFill>
-                  <a:srgbClr val="253746"/>
-                </a:solidFill>
-                <a:latin typeface="Aptos"/>
-              </a:defRPr>
-            </a:pPr>
-            <a:r>
-              <a:t>Dane–Puckett · N=39 · log10 RMSE</a:t>
+                <a:spcPts val="200"/>
+              </a:spcAft>
+              <a:defRPr sz="3000" b="1">
+                <a:solidFill>
+                  <a:srgbClr val="087F79"/>
+                </a:solidFill>
+                <a:latin typeface="Arial"/>
+              </a:defRPr>
+            </a:pPr>
+            <a:r>
+              <a:t>0.029326</a:t>
             </a:r>
           </a:p>
         </p:txBody>
@@ -3614,8 +3588,8 @@
         </p:nvSpPr>
         <p:spPr>
           <a:xfrm>
-            <a:off x="9189720" y="1115568"/>
-            <a:ext cx="2788920" cy="228600"/>
+            <a:off x="2743200" y="4105656"/>
+            <a:ext cx="1097280" cy="384048"/>
           </a:xfrm>
           <a:prstGeom prst="rect">
             <a:avLst/>
@@ -3623,24 +3597,24 @@
           <a:noFill/>
         </p:spPr>
         <p:txBody>
-          <a:bodyPr wrap="square" lIns="18288" tIns="9144" rIns="18288" bIns="9144">
+          <a:bodyPr wrap="square" lIns="13716" tIns="4572" rIns="13716" bIns="4572">
             <a:spAutoFit/>
           </a:bodyPr>
           <a:lstStyle/>
           <a:p>
             <a:pPr>
               <a:spcAft>
-                <a:spcPts val="300"/>
-              </a:spcAft>
-              <a:defRPr sz="1100" b="0">
-                <a:solidFill>
-                  <a:srgbClr val="657782"/>
-                </a:solidFill>
-                <a:latin typeface="Aptos"/>
-              </a:defRPr>
-            </a:pPr>
-            <a:r>
-              <a:t>WRC mean ensemble</a:t>
+                <a:spcPts val="200"/>
+              </a:spcAft>
+              <a:defRPr sz="1800" b="1">
+                <a:solidFill>
+                  <a:srgbClr val="087F79"/>
+                </a:solidFill>
+                <a:latin typeface="Arial"/>
+              </a:defRPr>
+            </a:pPr>
+            <a:r>
+              <a:t>−20.26%</a:t>
             </a:r>
           </a:p>
         </p:txBody>
@@ -3653,8 +3627,8 @@
         </p:nvSpPr>
         <p:spPr>
           <a:xfrm>
-            <a:off x="9189720" y="1353312"/>
-            <a:ext cx="2788920" cy="393192"/>
+            <a:off x="621792" y="4663440"/>
+            <a:ext cx="3291840" cy="566928"/>
           </a:xfrm>
           <a:prstGeom prst="rect">
             <a:avLst/>
@@ -3662,24 +3636,40 @@
           <a:noFill/>
         </p:spPr>
         <p:txBody>
-          <a:bodyPr wrap="square" lIns="18288" tIns="9144" rIns="18288" bIns="9144">
+          <a:bodyPr wrap="square" lIns="13716" tIns="4572" rIns="13716" bIns="4572">
             <a:spAutoFit/>
           </a:bodyPr>
           <a:lstStyle/>
           <a:p>
             <a:pPr>
               <a:spcAft>
-                <a:spcPts val="300"/>
-              </a:spcAft>
-              <a:defRPr sz="2700" b="1">
-                <a:solidFill>
-                  <a:srgbClr val="16766D"/>
-                </a:solidFill>
-                <a:latin typeface="Aptos"/>
-              </a:defRPr>
-            </a:pPr>
-            <a:r>
-              <a:t>−6.2%</a:t>
+                <a:spcPts val="200"/>
+              </a:spcAft>
+              <a:defRPr sz="1600" b="0">
+                <a:solidFill>
+                  <a:srgbClr val="087F79"/>
+                </a:solidFill>
+                <a:latin typeface="Arial"/>
+              </a:defRPr>
+            </a:pPr>
+            <a:r>
+              <a:t>Top-5 и top-3 проходят</a:t>
+            </a:r>
+          </a:p>
+          <a:p>
+            <a:pPr>
+              <a:spcAft>
+                <a:spcPts val="200"/>
+              </a:spcAft>
+              <a:defRPr sz="1600" b="0">
+                <a:solidFill>
+                  <a:srgbClr val="087F79"/>
+                </a:solidFill>
+                <a:latin typeface="Arial"/>
+              </a:defRPr>
+            </a:pPr>
+            <a:r>
+              <a:t>критерий устойчивости</a:t>
             </a:r>
           </a:p>
         </p:txBody>
@@ -3692,8 +3682,8 @@
         </p:nvSpPr>
         <p:spPr>
           <a:xfrm>
-            <a:off x="9189720" y="1792224"/>
-            <a:ext cx="2788920" cy="347472"/>
+            <a:off x="621792" y="5413248"/>
+            <a:ext cx="3291840" cy="228600"/>
           </a:xfrm>
           <a:prstGeom prst="rect">
             <a:avLst/>
@@ -3701,52 +3691,67 @@
           <a:noFill/>
         </p:spPr>
         <p:txBody>
-          <a:bodyPr wrap="square" lIns="18288" tIns="9144" rIns="18288" bIns="9144">
+          <a:bodyPr wrap="square" lIns="13716" tIns="4572" rIns="13716" bIns="4572">
             <a:spAutoFit/>
           </a:bodyPr>
           <a:lstStyle/>
           <a:p>
             <a:pPr>
               <a:spcAft>
-                <a:spcPts val="300"/>
-              </a:spcAft>
-              <a:defRPr sz="1000" b="0">
-                <a:solidFill>
-                  <a:srgbClr val="253746"/>
-                </a:solidFill>
-                <a:latin typeface="Aptos"/>
-              </a:defRPr>
-            </a:pPr>
-            <a:r>
-              <a:t>Pooled gain; no robust held-out gain</a:t>
-            </a:r>
-          </a:p>
-        </p:txBody>
-      </p:sp>
-      <p:pic>
-        <p:nvPicPr>
-          <p:cNvPr id="18" name="Picture 17" descr="figure_1_slide.png"/>
-          <p:cNvPicPr>
-            <a:picLocks noChangeAspect="1"/>
-          </p:cNvPicPr>
-          <p:nvPr/>
-        </p:nvPicPr>
-        <p:blipFill>
-          <a:blip r:embed="rId2"/>
-          <a:stretch>
-            <a:fillRect/>
-          </a:stretch>
-        </p:blipFill>
-        <p:spPr>
-          <a:xfrm>
-            <a:off x="137160" y="2194560"/>
-            <a:ext cx="11887200" cy="3237931"/>
-          </a:xfrm>
-          <a:prstGeom prst="rect">
-            <a:avLst/>
-          </a:prstGeom>
-        </p:spPr>
-      </p:pic>
+                <a:spcPts val="200"/>
+              </a:spcAft>
+              <a:defRPr sz="1200" b="0">
+                <a:solidFill>
+                  <a:srgbClr val="627482"/>
+                </a:solidFill>
+                <a:latin typeface="Arial"/>
+              </a:defRPr>
+            </a:pPr>
+            <a:r>
+              <a:t>Поддержка: 10–50.1 кПа; 2 источника</a:t>
+            </a:r>
+          </a:p>
+        </p:txBody>
+      </p:sp>
+      <p:sp>
+        <p:nvSpPr>
+          <p:cNvPr id="18" name="TextBox 17"/>
+          <p:cNvSpPr txBox="1"/>
+          <p:nvPr/>
+        </p:nvSpPr>
+        <p:spPr>
+          <a:xfrm>
+            <a:off x="4462272" y="1508760"/>
+            <a:ext cx="3291840" cy="366268"/>
+          </a:xfrm>
+          <a:prstGeom prst="rect">
+            <a:avLst/>
+          </a:prstGeom>
+          <a:noFill/>
+        </p:spPr>
+        <p:txBody>
+          <a:bodyPr wrap="square" lIns="13716" tIns="4572" rIns="13716" bIns="4572">
+            <a:spAutoFit/>
+          </a:bodyPr>
+          <a:lstStyle/>
+          <a:p>
+            <a:pPr>
+              <a:spcAft>
+                <a:spcPts val="200"/>
+              </a:spcAft>
+              <a:defRPr sz="2200" b="1">
+                <a:solidFill>
+                  <a:srgbClr val="193447"/>
+                </a:solidFill>
+                <a:latin typeface="Arial"/>
+              </a:defRPr>
+            </a:pPr>
+            <a:r>
+              <a:t>Массовая ОГХ</a:t>
+            </a:r>
+          </a:p>
+        </p:txBody>
+      </p:sp>
       <p:sp>
         <p:nvSpPr>
           <p:cNvPr id="19" name="TextBox 18"/>
@@ -3755,8 +3760,8 @@
         </p:nvSpPr>
         <p:spPr>
           <a:xfrm>
-            <a:off x="457200" y="5559552"/>
-            <a:ext cx="11247120" cy="713232"/>
+            <a:off x="4462272" y="1956816"/>
+            <a:ext cx="3291840" cy="850392"/>
           </a:xfrm>
           <a:prstGeom prst="rect">
             <a:avLst/>
@@ -3764,40 +3769,748 @@
           <a:noFill/>
         </p:spPr>
         <p:txBody>
-          <a:bodyPr wrap="square" lIns="18288" tIns="9144" rIns="18288" bIns="9144">
+          <a:bodyPr wrap="square" lIns="13716" tIns="4572" rIns="13716" bIns="4572">
             <a:spAutoFit/>
           </a:bodyPr>
           <a:lstStyle/>
           <a:p>
             <a:pPr>
               <a:spcAft>
-                <a:spcPts val="300"/>
-              </a:spcAft>
-              <a:defRPr sz="1500" b="0">
-                <a:solidFill>
-                  <a:srgbClr val="253746"/>
-                </a:solidFill>
-                <a:latin typeface="Aptos"/>
-              </a:defRPr>
-            </a:pPr>
-            <a:r>
-              <a:t>Varallyai B is the pooled volumetric candidate; Dane–Puckett maximizes Ksat coverage.</a:t>
-            </a:r>
-          </a:p>
-          <a:p>
-            <a:pPr>
-              <a:spcAft>
-                <a:spcPts val="300"/>
-              </a:spcAft>
-              <a:defRPr sz="1500" b="0">
-                <a:solidFill>
-                  <a:srgbClr val="253746"/>
-                </a:solidFill>
-                <a:latin typeface="Aptos"/>
-              </a:defRPr>
-            </a:pPr>
-            <a:r>
-              <a:t>Ksat common-cohort winner: gleyic cambisol sand (RMSE 0.270). Different cohorts cannot be directly ranked.</a:t>
+                <a:spcPts val="200"/>
+              </a:spcAft>
+              <a:defRPr sz="1800" b="0">
+                <a:solidFill>
+                  <a:srgbClr val="193447"/>
+                </a:solidFill>
+                <a:latin typeface="Arial"/>
+              </a:defRPr>
+            </a:pPr>
+            <a:r>
+              <a:t>Lal1979 group I from sand</a:t>
+            </a:r>
+          </a:p>
+          <a:p>
+            <a:pPr>
+              <a:spcAft>
+                <a:spcPts val="200"/>
+              </a:spcAft>
+              <a:defRPr sz="1800" b="0">
+                <a:solidFill>
+                  <a:srgbClr val="193447"/>
+                </a:solidFill>
+                <a:latin typeface="Arial"/>
+              </a:defRPr>
+            </a:pPr>
+            <a:r>
+              <a:t>Дискретное семейство ОГХ</a:t>
+            </a:r>
+          </a:p>
+        </p:txBody>
+      </p:sp>
+      <p:sp>
+        <p:nvSpPr>
+          <p:cNvPr id="20" name="TextBox 19"/>
+          <p:cNvSpPr txBox="1"/>
+          <p:nvPr/>
+        </p:nvSpPr>
+        <p:spPr>
+          <a:xfrm>
+            <a:off x="4462272" y="2944368"/>
+            <a:ext cx="3291840" cy="490220"/>
+          </a:xfrm>
+          <a:prstGeom prst="rect">
+            <a:avLst/>
+          </a:prstGeom>
+          <a:noFill/>
+        </p:spPr>
+        <p:txBody>
+          <a:bodyPr wrap="square" lIns="13716" tIns="4572" rIns="13716" bIns="4572">
+            <a:spAutoFit/>
+          </a:bodyPr>
+          <a:lstStyle/>
+          <a:p>
+            <a:pPr>
+              <a:spcAft>
+                <a:spcPts val="200"/>
+              </a:spcAft>
+              <a:defRPr sz="3000" b="1">
+                <a:solidFill>
+                  <a:srgbClr val="193447"/>
+                </a:solidFill>
+                <a:latin typeface="Arial"/>
+              </a:defRPr>
+            </a:pPr>
+            <a:r>
+              <a:t>0.068027</a:t>
+            </a:r>
+          </a:p>
+        </p:txBody>
+      </p:sp>
+      <p:sp>
+        <p:nvSpPr>
+          <p:cNvPr id="21" name="TextBox 20"/>
+          <p:cNvSpPr txBox="1"/>
+          <p:nvPr/>
+        </p:nvSpPr>
+        <p:spPr>
+          <a:xfrm>
+            <a:off x="4462272" y="3493008"/>
+            <a:ext cx="3291840" cy="320040"/>
+          </a:xfrm>
+          <a:prstGeom prst="rect">
+            <a:avLst/>
+          </a:prstGeom>
+          <a:noFill/>
+        </p:spPr>
+        <p:txBody>
+          <a:bodyPr wrap="square" lIns="13716" tIns="4572" rIns="13716" bIns="4572">
+            <a:spAutoFit/>
+          </a:bodyPr>
+          <a:lstStyle/>
+          <a:p>
+            <a:pPr>
+              <a:spcAft>
+                <a:spcPts val="200"/>
+              </a:spcAft>
+              <a:defRPr sz="1300" b="0">
+                <a:solidFill>
+                  <a:srgbClr val="627482"/>
+                </a:solidFill>
+                <a:latin typeface="Arial"/>
+              </a:defRPr>
+            </a:pPr>
+            <a:r>
+              <a:t>RMSE, кг/кг • 10 образцов / 30 точек</a:t>
+            </a:r>
+          </a:p>
+        </p:txBody>
+      </p:sp>
+      <p:sp>
+        <p:nvSpPr>
+          <p:cNvPr id="22" name="TextBox 21"/>
+          <p:cNvSpPr txBox="1"/>
+          <p:nvPr/>
+        </p:nvSpPr>
+        <p:spPr>
+          <a:xfrm>
+            <a:off x="4462272" y="4160520"/>
+            <a:ext cx="3291840" cy="886968"/>
+          </a:xfrm>
+          <a:prstGeom prst="rect">
+            <a:avLst/>
+          </a:prstGeom>
+          <a:noFill/>
+        </p:spPr>
+        <p:txBody>
+          <a:bodyPr wrap="square" lIns="13716" tIns="4572" rIns="13716" bIns="4572">
+            <a:spAutoFit/>
+          </a:bodyPr>
+          <a:lstStyle/>
+          <a:p>
+            <a:pPr>
+              <a:spcAft>
+                <a:spcPts val="200"/>
+              </a:spcAft>
+              <a:defRPr sz="1900" b="0">
+                <a:solidFill>
+                  <a:srgbClr val="627482"/>
+                </a:solidFill>
+                <a:latin typeface="Arial"/>
+              </a:defRPr>
+            </a:pPr>
+            <a:r>
+              <a:rPr dirty="0" err="1"/>
+              <a:t>Ансамбль</a:t>
+            </a:r>
+            <a:r>
+              <a:rPr dirty="0"/>
+              <a:t> </a:t>
+            </a:r>
+            <a:r>
+              <a:rPr dirty="0" err="1"/>
+              <a:t>устойчивого</a:t>
+            </a:r>
+            <a:endParaRPr dirty="0"/>
+          </a:p>
+          <a:p>
+            <a:pPr>
+              <a:spcAft>
+                <a:spcPts val="200"/>
+              </a:spcAft>
+              <a:defRPr sz="1900" b="0">
+                <a:solidFill>
+                  <a:srgbClr val="627482"/>
+                </a:solidFill>
+                <a:latin typeface="Arial"/>
+              </a:defRPr>
+            </a:pPr>
+            <a:r>
+              <a:rPr dirty="0" err="1"/>
+              <a:t>преимущества</a:t>
+            </a:r>
+            <a:r>
+              <a:rPr dirty="0"/>
+              <a:t> </a:t>
+            </a:r>
+            <a:r>
+              <a:rPr dirty="0" err="1"/>
+              <a:t>не</a:t>
+            </a:r>
+            <a:r>
+              <a:rPr dirty="0"/>
+              <a:t> </a:t>
+            </a:r>
+            <a:r>
+              <a:rPr dirty="0" err="1"/>
+              <a:t>показал</a:t>
+            </a:r>
+            <a:endParaRPr dirty="0"/>
+          </a:p>
+        </p:txBody>
+      </p:sp>
+      <p:sp>
+        <p:nvSpPr>
+          <p:cNvPr id="23" name="TextBox 22"/>
+          <p:cNvSpPr txBox="1"/>
+          <p:nvPr/>
+        </p:nvSpPr>
+        <p:spPr>
+          <a:xfrm>
+            <a:off x="4462272" y="5276088"/>
+            <a:ext cx="3291840" cy="422656"/>
+          </a:xfrm>
+          <a:prstGeom prst="rect">
+            <a:avLst/>
+          </a:prstGeom>
+          <a:noFill/>
+        </p:spPr>
+        <p:txBody>
+          <a:bodyPr wrap="square" lIns="13716" tIns="4572" rIns="13716" bIns="4572">
+            <a:spAutoFit/>
+          </a:bodyPr>
+          <a:lstStyle/>
+          <a:p>
+            <a:pPr>
+              <a:spcAft>
+                <a:spcPts val="200"/>
+              </a:spcAft>
+              <a:defRPr sz="1200" b="0">
+                <a:solidFill>
+                  <a:srgbClr val="627482"/>
+                </a:solidFill>
+                <a:latin typeface="Arial"/>
+              </a:defRPr>
+            </a:pPr>
+            <a:r>
+              <a:t>Поддержка: 93.8–585.6 кПа</a:t>
+            </a:r>
+          </a:p>
+          <a:p>
+            <a:pPr>
+              <a:spcAft>
+                <a:spcPts val="200"/>
+              </a:spcAft>
+              <a:defRPr sz="1200" b="0">
+                <a:solidFill>
+                  <a:srgbClr val="627482"/>
+                </a:solidFill>
+                <a:latin typeface="Arial"/>
+              </a:defRPr>
+            </a:pPr>
+            <a:r>
+              <a:t>Один источник</a:t>
+            </a:r>
+          </a:p>
+        </p:txBody>
+      </p:sp>
+      <p:sp>
+        <p:nvSpPr>
+          <p:cNvPr id="24" name="TextBox 23"/>
+          <p:cNvSpPr txBox="1"/>
+          <p:nvPr/>
+        </p:nvSpPr>
+        <p:spPr>
+          <a:xfrm>
+            <a:off x="8302752" y="1508760"/>
+            <a:ext cx="3291840" cy="366268"/>
+          </a:xfrm>
+          <a:prstGeom prst="rect">
+            <a:avLst/>
+          </a:prstGeom>
+          <a:noFill/>
+        </p:spPr>
+        <p:txBody>
+          <a:bodyPr wrap="square" lIns="13716" tIns="4572" rIns="13716" bIns="4572">
+            <a:spAutoFit/>
+          </a:bodyPr>
+          <a:lstStyle/>
+          <a:p>
+            <a:pPr>
+              <a:spcAft>
+                <a:spcPts val="200"/>
+              </a:spcAft>
+              <a:defRPr sz="2200" b="1">
+                <a:solidFill>
+                  <a:srgbClr val="193447"/>
+                </a:solidFill>
+                <a:latin typeface="Arial"/>
+              </a:defRPr>
+            </a:pPr>
+            <a:r>
+              <a:t>Ksat</a:t>
+            </a:r>
+          </a:p>
+        </p:txBody>
+      </p:sp>
+      <p:sp>
+        <p:nvSpPr>
+          <p:cNvPr id="26" name="TextBox 25"/>
+          <p:cNvSpPr txBox="1"/>
+          <p:nvPr/>
+        </p:nvSpPr>
+        <p:spPr>
+          <a:xfrm>
+            <a:off x="8229600" y="2003534"/>
+            <a:ext cx="3291840" cy="603504"/>
+          </a:xfrm>
+          <a:prstGeom prst="rect">
+            <a:avLst/>
+          </a:prstGeom>
+          <a:noFill/>
+        </p:spPr>
+        <p:txBody>
+          <a:bodyPr wrap="square" lIns="13716" tIns="4572" rIns="13716" bIns="4572">
+            <a:spAutoFit/>
+          </a:bodyPr>
+          <a:lstStyle/>
+          <a:p>
+            <a:pPr>
+              <a:spcAft>
+                <a:spcPts val="200"/>
+              </a:spcAft>
+              <a:defRPr sz="1700" b="0">
+                <a:solidFill>
+                  <a:srgbClr val="193447"/>
+                </a:solidFill>
+                <a:latin typeface="Arial"/>
+              </a:defRPr>
+            </a:pPr>
+            <a:r>
+              <a:rPr dirty="0"/>
+              <a:t>Ferrer-</a:t>
+            </a:r>
+            <a:r>
+              <a:rPr dirty="0" err="1"/>
+              <a:t>Julià</a:t>
+            </a:r>
+            <a:r>
+              <a:rPr dirty="0"/>
+              <a:t> 2004</a:t>
+            </a:r>
+          </a:p>
+          <a:p>
+            <a:pPr>
+              <a:spcAft>
+                <a:spcPts val="200"/>
+              </a:spcAft>
+              <a:defRPr sz="1700" b="0">
+                <a:solidFill>
+                  <a:srgbClr val="193447"/>
+                </a:solidFill>
+                <a:latin typeface="Arial"/>
+              </a:defRPr>
+            </a:pPr>
+            <a:r>
+              <a:rPr dirty="0"/>
+              <a:t>gleyic </a:t>
+            </a:r>
+            <a:r>
+              <a:rPr dirty="0" err="1"/>
+              <a:t>cambisol</a:t>
+            </a:r>
+            <a:r>
+              <a:rPr dirty="0"/>
+              <a:t> sand</a:t>
+            </a:r>
+          </a:p>
+        </p:txBody>
+      </p:sp>
+      <p:sp>
+        <p:nvSpPr>
+          <p:cNvPr id="27" name="TextBox 26"/>
+          <p:cNvSpPr txBox="1"/>
+          <p:nvPr/>
+        </p:nvSpPr>
+        <p:spPr>
+          <a:xfrm>
+            <a:off x="8302752" y="2962656"/>
+            <a:ext cx="3291840" cy="443738"/>
+          </a:xfrm>
+          <a:prstGeom prst="rect">
+            <a:avLst/>
+          </a:prstGeom>
+          <a:noFill/>
+        </p:spPr>
+        <p:txBody>
+          <a:bodyPr wrap="square" lIns="13716" tIns="4572" rIns="13716" bIns="4572">
+            <a:spAutoFit/>
+          </a:bodyPr>
+          <a:lstStyle/>
+          <a:p>
+            <a:pPr>
+              <a:spcAft>
+                <a:spcPts val="200"/>
+              </a:spcAft>
+              <a:defRPr sz="2700" b="1">
+                <a:solidFill>
+                  <a:srgbClr val="193447"/>
+                </a:solidFill>
+                <a:latin typeface="Arial"/>
+              </a:defRPr>
+            </a:pPr>
+            <a:r>
+              <a:t>0.270425</a:t>
+            </a:r>
+          </a:p>
+        </p:txBody>
+      </p:sp>
+      <p:sp>
+        <p:nvSpPr>
+          <p:cNvPr id="28" name="TextBox 27"/>
+          <p:cNvSpPr txBox="1"/>
+          <p:nvPr/>
+        </p:nvSpPr>
+        <p:spPr>
+          <a:xfrm>
+            <a:off x="8302752" y="3493008"/>
+            <a:ext cx="3291840" cy="484632"/>
+          </a:xfrm>
+          <a:prstGeom prst="rect">
+            <a:avLst/>
+          </a:prstGeom>
+          <a:noFill/>
+        </p:spPr>
+        <p:txBody>
+          <a:bodyPr wrap="square" lIns="13716" tIns="4572" rIns="13716" bIns="4572">
+            <a:spAutoFit/>
+          </a:bodyPr>
+          <a:lstStyle/>
+          <a:p>
+            <a:pPr>
+              <a:spcAft>
+                <a:spcPts val="200"/>
+              </a:spcAft>
+              <a:defRPr sz="1300" b="0">
+                <a:solidFill>
+                  <a:srgbClr val="627482"/>
+                </a:solidFill>
+                <a:latin typeface="Arial"/>
+              </a:defRPr>
+            </a:pPr>
+            <a:r>
+              <a:t>RMSE(log10)</a:t>
+            </a:r>
+          </a:p>
+          <a:p>
+            <a:pPr>
+              <a:spcAft>
+                <a:spcPts val="200"/>
+              </a:spcAft>
+              <a:defRPr sz="1300" b="0">
+                <a:solidFill>
+                  <a:srgbClr val="627482"/>
+                </a:solidFill>
+                <a:latin typeface="Arial"/>
+              </a:defRPr>
+            </a:pPr>
+            <a:r>
+              <a:t>×2: 80%   ×5: 96.7%   ×10: 100%</a:t>
+            </a:r>
+          </a:p>
+        </p:txBody>
+      </p:sp>
+      <p:sp>
+        <p:nvSpPr>
+          <p:cNvPr id="29" name="TextBox 28"/>
+          <p:cNvSpPr txBox="1"/>
+          <p:nvPr/>
+        </p:nvSpPr>
+        <p:spPr>
+          <a:xfrm>
+            <a:off x="8302752" y="4160520"/>
+            <a:ext cx="3291840" cy="246888"/>
+          </a:xfrm>
+          <a:prstGeom prst="rect">
+            <a:avLst/>
+          </a:prstGeom>
+          <a:noFill/>
+        </p:spPr>
+        <p:txBody>
+          <a:bodyPr wrap="square" lIns="13716" tIns="4572" rIns="13716" bIns="4572">
+            <a:spAutoFit/>
+          </a:bodyPr>
+          <a:lstStyle/>
+          <a:p>
+            <a:pPr>
+              <a:spcAft>
+                <a:spcPts val="200"/>
+              </a:spcAft>
+              <a:defRPr sz="1300" b="0">
+                <a:solidFill>
+                  <a:srgbClr val="087F79"/>
+                </a:solidFill>
+                <a:latin typeface="Arial"/>
+              </a:defRPr>
+            </a:pPr>
+            <a:r>
+              <a:t>Максимальное покрытие • N=39</a:t>
+            </a:r>
+          </a:p>
+        </p:txBody>
+      </p:sp>
+      <p:sp>
+        <p:nvSpPr>
+          <p:cNvPr id="30" name="TextBox 29"/>
+          <p:cNvSpPr txBox="1"/>
+          <p:nvPr/>
+        </p:nvSpPr>
+        <p:spPr>
+          <a:xfrm>
+            <a:off x="8302752" y="4553712"/>
+            <a:ext cx="3383280" cy="384048"/>
+          </a:xfrm>
+          <a:prstGeom prst="rect">
+            <a:avLst/>
+          </a:prstGeom>
+          <a:noFill/>
+        </p:spPr>
+        <p:txBody>
+          <a:bodyPr wrap="square" lIns="13716" tIns="4572" rIns="13716" bIns="4572">
+            <a:spAutoFit/>
+          </a:bodyPr>
+          <a:lstStyle/>
+          <a:p>
+            <a:pPr>
+              <a:spcAft>
+                <a:spcPts val="200"/>
+              </a:spcAft>
+              <a:defRPr sz="1700" b="1">
+                <a:solidFill>
+                  <a:srgbClr val="087F79"/>
+                </a:solidFill>
+                <a:latin typeface="Arial"/>
+              </a:defRPr>
+            </a:pPr>
+            <a:r>
+              <a:rPr dirty="0"/>
+              <a:t>Ferrer-</a:t>
+            </a:r>
+            <a:r>
+              <a:rPr dirty="0" err="1"/>
+              <a:t>Julià</a:t>
+            </a:r>
+            <a:r>
+              <a:rPr dirty="0"/>
+              <a:t> 2004 Dane–Puckett</a:t>
+            </a:r>
+          </a:p>
+        </p:txBody>
+      </p:sp>
+      <p:sp>
+        <p:nvSpPr>
+          <p:cNvPr id="31" name="TextBox 30"/>
+          <p:cNvSpPr txBox="1"/>
+          <p:nvPr/>
+        </p:nvSpPr>
+        <p:spPr>
+          <a:xfrm>
+            <a:off x="8302752" y="5074920"/>
+            <a:ext cx="3291840" cy="443738"/>
+          </a:xfrm>
+          <a:prstGeom prst="rect">
+            <a:avLst/>
+          </a:prstGeom>
+          <a:noFill/>
+        </p:spPr>
+        <p:txBody>
+          <a:bodyPr wrap="square" lIns="13716" tIns="4572" rIns="13716" bIns="4572">
+            <a:spAutoFit/>
+          </a:bodyPr>
+          <a:lstStyle/>
+          <a:p>
+            <a:pPr>
+              <a:spcAft>
+                <a:spcPts val="200"/>
+              </a:spcAft>
+              <a:defRPr sz="2700" b="1">
+                <a:solidFill>
+                  <a:srgbClr val="087F79"/>
+                </a:solidFill>
+                <a:latin typeface="Arial"/>
+              </a:defRPr>
+            </a:pPr>
+            <a:r>
+              <a:t>0.717641</a:t>
+            </a:r>
+          </a:p>
+        </p:txBody>
+      </p:sp>
+      <p:sp>
+        <p:nvSpPr>
+          <p:cNvPr id="32" name="TextBox 31"/>
+          <p:cNvSpPr txBox="1"/>
+          <p:nvPr/>
+        </p:nvSpPr>
+        <p:spPr>
+          <a:xfrm>
+            <a:off x="8302752" y="5532120"/>
+            <a:ext cx="3291840" cy="195834"/>
+          </a:xfrm>
+          <a:prstGeom prst="rect">
+            <a:avLst/>
+          </a:prstGeom>
+          <a:noFill/>
+        </p:spPr>
+        <p:txBody>
+          <a:bodyPr wrap="square" lIns="13716" tIns="4572" rIns="13716" bIns="4572">
+            <a:spAutoFit/>
+          </a:bodyPr>
+          <a:lstStyle/>
+          <a:p>
+            <a:pPr>
+              <a:spcAft>
+                <a:spcPts val="200"/>
+              </a:spcAft>
+              <a:defRPr sz="1100" b="0">
+                <a:solidFill>
+                  <a:srgbClr val="627482"/>
+                </a:solidFill>
+                <a:latin typeface="Arial"/>
+              </a:defRPr>
+            </a:pPr>
+            <a:r>
+              <a:t>RMSE(log10); зависит от блока данных</a:t>
+            </a:r>
+          </a:p>
+        </p:txBody>
+      </p:sp>
+      <p:sp>
+        <p:nvSpPr>
+          <p:cNvPr id="33" name="TextBox 32"/>
+          <p:cNvSpPr txBox="1"/>
+          <p:nvPr/>
+        </p:nvSpPr>
+        <p:spPr>
+          <a:xfrm>
+            <a:off x="438912" y="5989320"/>
+            <a:ext cx="11201400" cy="546608"/>
+          </a:xfrm>
+          <a:prstGeom prst="rect">
+            <a:avLst/>
+          </a:prstGeom>
+          <a:noFill/>
+        </p:spPr>
+        <p:txBody>
+          <a:bodyPr wrap="square" lIns="13716" tIns="4572" rIns="13716" bIns="4572">
+            <a:spAutoFit/>
+          </a:bodyPr>
+          <a:lstStyle/>
+          <a:p>
+            <a:pPr>
+              <a:spcAft>
+                <a:spcPts val="200"/>
+              </a:spcAft>
+              <a:defRPr sz="1600" b="1">
+                <a:solidFill>
+                  <a:srgbClr val="193447"/>
+                </a:solidFill>
+                <a:latin typeface="Arial"/>
+              </a:defRPr>
+            </a:pPr>
+            <a:r>
+              <a:rPr dirty="0" err="1"/>
+              <a:t>Объёмная</a:t>
+            </a:r>
+            <a:r>
+              <a:rPr dirty="0"/>
+              <a:t> ОГХ — </a:t>
+            </a:r>
+            <a:r>
+              <a:rPr dirty="0" err="1"/>
+              <a:t>ансамбль</a:t>
+            </a:r>
+            <a:r>
+              <a:rPr dirty="0"/>
+              <a:t> </a:t>
+            </a:r>
+            <a:r>
+              <a:rPr dirty="0" err="1"/>
+              <a:t>пяти</a:t>
+            </a:r>
+            <a:r>
+              <a:rPr dirty="0"/>
+              <a:t> PTF; </a:t>
+            </a:r>
+            <a:r>
+              <a:rPr dirty="0" err="1"/>
+              <a:t>массовая</a:t>
+            </a:r>
+            <a:r>
+              <a:rPr dirty="0"/>
+              <a:t> ОГХ — </a:t>
+            </a:r>
+            <a:r>
+              <a:rPr dirty="0" err="1"/>
+              <a:t>семейство</a:t>
+            </a:r>
+            <a:r>
+              <a:rPr dirty="0"/>
+              <a:t> Lal1979;</a:t>
+            </a:r>
+          </a:p>
+          <a:p>
+            <a:pPr>
+              <a:spcAft>
+                <a:spcPts val="200"/>
+              </a:spcAft>
+              <a:defRPr sz="1600" b="1">
+                <a:solidFill>
+                  <a:srgbClr val="193447"/>
+                </a:solidFill>
+                <a:latin typeface="Arial"/>
+              </a:defRPr>
+            </a:pPr>
+            <a:r>
+              <a:rPr dirty="0" err="1"/>
+              <a:t>Ksat</a:t>
+            </a:r>
+            <a:r>
+              <a:rPr dirty="0"/>
+              <a:t> </a:t>
+            </a:r>
+            <a:r>
+              <a:rPr dirty="0" err="1"/>
+              <a:t>при</a:t>
+            </a:r>
+            <a:r>
+              <a:rPr dirty="0"/>
+              <a:t> </a:t>
+            </a:r>
+            <a:r>
+              <a:rPr dirty="0" err="1"/>
+              <a:t>максимальном</a:t>
+            </a:r>
+            <a:r>
+              <a:rPr dirty="0"/>
+              <a:t> </a:t>
+            </a:r>
+            <a:r>
+              <a:rPr dirty="0" err="1"/>
+              <a:t>покрытии</a:t>
+            </a:r>
+            <a:r>
+              <a:rPr dirty="0"/>
+              <a:t> — Dane–Puckett.</a:t>
             </a:r>
           </a:p>
         </p:txBody>
@@ -3843,8 +4556,8 @@
         </p:nvSpPr>
         <p:spPr>
           <a:xfrm>
-            <a:off x="365760" y="201168"/>
-            <a:ext cx="11430000" cy="457200"/>
+            <a:off x="411480" y="228600"/>
+            <a:ext cx="11338560" cy="502920"/>
           </a:xfrm>
           <a:prstGeom prst="rect">
             <a:avLst/>
@@ -3852,63 +4565,24 @@
           <a:noFill/>
         </p:spPr>
         <p:txBody>
-          <a:bodyPr wrap="square" lIns="18288" tIns="9144" rIns="18288" bIns="9144">
+          <a:bodyPr wrap="square" lIns="13716" tIns="4572" rIns="13716" bIns="4572">
             <a:spAutoFit/>
           </a:bodyPr>
           <a:lstStyle/>
           <a:p>
             <a:pPr>
               <a:spcAft>
-                <a:spcPts val="300"/>
-              </a:spcAft>
-              <a:defRPr sz="2500" b="1">
-                <a:solidFill>
-                  <a:srgbClr val="253746"/>
-                </a:solidFill>
-                <a:latin typeface="Aptos"/>
+                <a:spcPts val="200"/>
+              </a:spcAft>
+              <a:defRPr sz="2700" b="1">
+                <a:solidFill>
+                  <a:srgbClr val="193447"/>
+                </a:solidFill>
+                <a:latin typeface="Arial"/>
               </a:defRPr>
             </a:pPr>
             <a:r>
               <a:t>Аппроксимация экспериментальной ОГХ</a:t>
-            </a:r>
-          </a:p>
-        </p:txBody>
-      </p:sp>
-      <p:sp>
-        <p:nvSpPr>
-          <p:cNvPr id="3" name="TextBox 2"/>
-          <p:cNvSpPr txBox="1"/>
-          <p:nvPr/>
-        </p:nvSpPr>
-        <p:spPr>
-          <a:xfrm>
-            <a:off x="365760" y="6528816"/>
-            <a:ext cx="10972800" cy="182880"/>
-          </a:xfrm>
-          <a:prstGeom prst="rect">
-            <a:avLst/>
-          </a:prstGeom>
-          <a:noFill/>
-        </p:spPr>
-        <p:txBody>
-          <a:bodyPr wrap="square" lIns="18288" tIns="9144" rIns="18288" bIns="9144">
-            <a:spAutoFit/>
-          </a:bodyPr>
-          <a:lstStyle/>
-          <a:p>
-            <a:pPr>
-              <a:spcAft>
-                <a:spcPts val="300"/>
-              </a:spcAft>
-              <a:defRPr sz="900" b="0">
-                <a:solidFill>
-                  <a:srgbClr val="657782"/>
-                </a:solidFill>
-                <a:latin typeface="Aptos"/>
-              </a:defRPr>
-            </a:pPr>
-            <a:r>
-              <a:t>Exploratory benchmark, meta_v3.3; results are dataset-specific.</a:t>
             </a:r>
           </a:p>
         </p:txBody>
@@ -3921,8 +4595,8 @@
         </p:nvSpPr>
         <p:spPr>
           <a:xfrm>
-            <a:off x="11430000" y="6528816"/>
-            <a:ext cx="274320" cy="182880"/>
+            <a:off x="11338560" y="6510528"/>
+            <a:ext cx="365760" cy="228600"/>
           </a:xfrm>
           <a:prstGeom prst="rect">
             <a:avLst/>
@@ -3930,20 +4604,20 @@
           <a:noFill/>
         </p:spPr>
         <p:txBody>
-          <a:bodyPr wrap="square" lIns="18288" tIns="9144" rIns="18288" bIns="9144">
+          <a:bodyPr wrap="square" lIns="13716" tIns="4572" rIns="13716" bIns="4572">
             <a:spAutoFit/>
           </a:bodyPr>
           <a:lstStyle/>
           <a:p>
             <a:pPr>
               <a:spcAft>
-                <a:spcPts val="300"/>
-              </a:spcAft>
-              <a:defRPr sz="900" b="0">
-                <a:solidFill>
-                  <a:srgbClr val="657782"/>
-                </a:solidFill>
-                <a:latin typeface="Aptos"/>
+                <a:spcPts val="200"/>
+              </a:spcAft>
+              <a:defRPr sz="1100" b="0">
+                <a:solidFill>
+                  <a:srgbClr val="627482"/>
+                </a:solidFill>
+                <a:latin typeface="Arial"/>
               </a:defRPr>
             </a:pPr>
             <a:r>
@@ -3960,8 +4634,8 @@
         </p:nvSpPr>
         <p:spPr>
           <a:xfrm>
-            <a:off x="384048" y="777240"/>
-            <a:ext cx="11338560" cy="502920"/>
+            <a:off x="429768" y="850392"/>
+            <a:ext cx="11247120" cy="304292"/>
           </a:xfrm>
           <a:prstGeom prst="rect">
             <a:avLst/>
@@ -3969,52 +4643,74 @@
           <a:noFill/>
         </p:spPr>
         <p:txBody>
-          <a:bodyPr wrap="square" lIns="18288" tIns="9144" rIns="18288" bIns="9144">
+          <a:bodyPr wrap="square" lIns="13716" tIns="4572" rIns="13716" bIns="4572">
             <a:spAutoFit/>
           </a:bodyPr>
           <a:lstStyle/>
           <a:p>
             <a:pPr>
               <a:spcAft>
-                <a:spcPts val="300"/>
-              </a:spcAft>
-              <a:defRPr sz="1700" b="1">
-                <a:solidFill>
-                  <a:srgbClr val="16766D"/>
-                </a:solidFill>
-                <a:latin typeface="Aptos"/>
-              </a:defRPr>
-            </a:pPr>
-            <a:r>
-              <a:t>VG m=1: lowest median RMSE in both bases — 0.0075 m³/m³ (N=76); 0.0091 kg/kg (N=65).</a:t>
-            </a:r>
-          </a:p>
-        </p:txBody>
-      </p:sp>
-      <p:pic>
-        <p:nvPicPr>
-          <p:cNvPr id="6" name="Picture 5" descr="figure_2_wrc_approximation.png"/>
-          <p:cNvPicPr>
-            <a:picLocks noChangeAspect="1"/>
-          </p:cNvPicPr>
-          <p:nvPr/>
-        </p:nvPicPr>
-        <p:blipFill>
-          <a:blip r:embed="rId2"/>
-          <a:stretch>
-            <a:fillRect/>
-          </a:stretch>
-        </p:blipFill>
-        <p:spPr>
-          <a:xfrm>
-            <a:off x="182880" y="1353312"/>
-            <a:ext cx="11795760" cy="4718304"/>
-          </a:xfrm>
-          <a:prstGeom prst="rect">
-            <a:avLst/>
-          </a:prstGeom>
-        </p:spPr>
-      </p:pic>
+                <a:spcPts val="200"/>
+              </a:spcAft>
+              <a:defRPr sz="1800" b="1">
+                <a:solidFill>
+                  <a:srgbClr val="087F79"/>
+                </a:solidFill>
+                <a:latin typeface="Arial"/>
+              </a:defRPr>
+            </a:pPr>
+            <a:r>
+              <a:t>VG m=1 даёт наименьшую медианную ошибку в целом для обеих водных баз</a:t>
+            </a:r>
+          </a:p>
+        </p:txBody>
+      </p:sp>
+      <p:sp>
+        <p:nvSpPr>
+          <p:cNvPr id="6" name="Rounded Rectangle 5"/>
+          <p:cNvSpPr/>
+          <p:nvPr/>
+        </p:nvSpPr>
+        <p:spPr>
+          <a:xfrm>
+            <a:off x="411480" y="1353312"/>
+            <a:ext cx="5504688" cy="3136392"/>
+          </a:xfrm>
+          <a:prstGeom prst="roundRect">
+            <a:avLst>
+              <a:gd name="adj" fmla="val 8000"/>
+            </a:avLst>
+          </a:prstGeom>
+          <a:solidFill>
+            <a:srgbClr val="F0F6F7"/>
+          </a:solidFill>
+          <a:ln>
+            <a:noFill/>
+          </a:ln>
+        </p:spPr>
+        <p:style>
+          <a:lnRef idx="1">
+            <a:schemeClr val="accent1"/>
+          </a:lnRef>
+          <a:fillRef idx="3">
+            <a:schemeClr val="accent1"/>
+          </a:fillRef>
+          <a:effectRef idx="2">
+            <a:schemeClr val="accent1"/>
+          </a:effectRef>
+          <a:fontRef idx="minor">
+            <a:schemeClr val="lt1"/>
+          </a:fontRef>
+        </p:style>
+        <p:txBody>
+          <a:bodyPr rtlCol="0" anchor="ctr"/>
+          <a:lstStyle/>
+          <a:p>
+            <a:pPr algn="ctr"/>
+            <a:endParaRPr/>
+          </a:p>
+        </p:txBody>
+      </p:sp>
       <p:sp>
         <p:nvSpPr>
           <p:cNvPr id="7" name="TextBox 6"/>
@@ -4023,8 +4719,8 @@
         </p:nvSpPr>
         <p:spPr>
           <a:xfrm>
-            <a:off x="411480" y="6144768"/>
-            <a:ext cx="11338560" cy="329184"/>
+            <a:off x="594360" y="1517904"/>
+            <a:ext cx="5120640" cy="365760"/>
           </a:xfrm>
           <a:prstGeom prst="rect">
             <a:avLst/>
@@ -4032,40 +4728,2996 @@
           <a:noFill/>
         </p:spPr>
         <p:txBody>
-          <a:bodyPr wrap="square" lIns="18288" tIns="9144" rIns="18288" bIns="9144">
+          <a:bodyPr wrap="square" lIns="13716" tIns="4572" rIns="13716" bIns="4572">
             <a:spAutoFit/>
           </a:bodyPr>
           <a:lstStyle/>
           <a:p>
             <a:pPr>
               <a:spcAft>
-                <a:spcPts val="300"/>
+                <a:spcPts val="200"/>
+              </a:spcAft>
+              <a:defRPr sz="1900" b="1">
+                <a:solidFill>
+                  <a:srgbClr val="193447"/>
+                </a:solidFill>
+                <a:latin typeface="Arial"/>
+              </a:defRPr>
+            </a:pPr>
+            <a:r>
+              <a:t>Объёмная влажность • м³/м³ • N=76</a:t>
+            </a:r>
+          </a:p>
+        </p:txBody>
+      </p:sp>
+      <p:sp>
+        <p:nvSpPr>
+          <p:cNvPr id="8" name="TextBox 7"/>
+          <p:cNvSpPr txBox="1"/>
+          <p:nvPr/>
+        </p:nvSpPr>
+        <p:spPr>
+          <a:xfrm>
+            <a:off x="594360" y="1993392"/>
+            <a:ext cx="2221992" cy="274320"/>
+          </a:xfrm>
+          <a:prstGeom prst="rect">
+            <a:avLst/>
+          </a:prstGeom>
+          <a:noFill/>
+        </p:spPr>
+        <p:txBody>
+          <a:bodyPr wrap="square" lIns="13716" tIns="4572" rIns="13716" bIns="4572">
+            <a:spAutoFit/>
+          </a:bodyPr>
+          <a:lstStyle/>
+          <a:p>
+            <a:pPr>
+              <a:spcAft>
+                <a:spcPts val="200"/>
+              </a:spcAft>
+              <a:defRPr sz="1200" b="0">
+                <a:solidFill>
+                  <a:srgbClr val="627482"/>
+                </a:solidFill>
+                <a:latin typeface="Arial"/>
+              </a:defRPr>
+            </a:pPr>
+            <a:r>
+              <a:t>Семейство</a:t>
+            </a:r>
+          </a:p>
+        </p:txBody>
+      </p:sp>
+      <p:sp>
+        <p:nvSpPr>
+          <p:cNvPr id="9" name="TextBox 8"/>
+          <p:cNvSpPr txBox="1"/>
+          <p:nvPr/>
+        </p:nvSpPr>
+        <p:spPr>
+          <a:xfrm>
+            <a:off x="2880360" y="1993392"/>
+            <a:ext cx="1280160" cy="274320"/>
+          </a:xfrm>
+          <a:prstGeom prst="rect">
+            <a:avLst/>
+          </a:prstGeom>
+          <a:noFill/>
+        </p:spPr>
+        <p:txBody>
+          <a:bodyPr wrap="square" lIns="13716" tIns="4572" rIns="13716" bIns="4572">
+            <a:spAutoFit/>
+          </a:bodyPr>
+          <a:lstStyle/>
+          <a:p>
+            <a:pPr>
+              <a:spcAft>
+                <a:spcPts val="200"/>
+              </a:spcAft>
+              <a:defRPr sz="1200" b="0">
+                <a:solidFill>
+                  <a:srgbClr val="627482"/>
+                </a:solidFill>
+                <a:latin typeface="Arial"/>
+              </a:defRPr>
+            </a:pPr>
+            <a:r>
+              <a:t>Median RMSE</a:t>
+            </a:r>
+          </a:p>
+        </p:txBody>
+      </p:sp>
+      <p:sp>
+        <p:nvSpPr>
+          <p:cNvPr id="10" name="TextBox 9"/>
+          <p:cNvSpPr txBox="1"/>
+          <p:nvPr/>
+        </p:nvSpPr>
+        <p:spPr>
+          <a:xfrm>
+            <a:off x="4297680" y="1920240"/>
+            <a:ext cx="1417320" cy="438912"/>
+          </a:xfrm>
+          <a:prstGeom prst="rect">
+            <a:avLst/>
+          </a:prstGeom>
+          <a:noFill/>
+        </p:spPr>
+        <p:txBody>
+          <a:bodyPr wrap="square" lIns="13716" tIns="4572" rIns="13716" bIns="4572">
+            <a:spAutoFit/>
+          </a:bodyPr>
+          <a:lstStyle/>
+          <a:p>
+            <a:pPr>
+              <a:spcAft>
+                <a:spcPts val="200"/>
               </a:spcAft>
               <a:defRPr sz="1000" b="0">
                 <a:solidFill>
-                  <a:srgbClr val="253746"/>
-                </a:solidFill>
-                <a:latin typeface="Aptos"/>
-              </a:defRPr>
-            </a:pPr>
-            <a:r>
-              <a:t>Volume: smallest errors below 10 kPa; regional VG differences are unclear. Mass: VG m=1 leads in all regions.</a:t>
-            </a:r>
-          </a:p>
-          <a:p>
-            <a:pPr>
-              <a:spcAft>
-                <a:spcPts val="300"/>
+                  <a:srgbClr val="627482"/>
+                </a:solidFill>
+                <a:latin typeface="Arial"/>
+              </a:defRPr>
+            </a:pPr>
+            <a:r>
+              <a:t>Успех fit</a:t>
+            </a:r>
+          </a:p>
+          <a:p>
+            <a:pPr>
+              <a:spcAft>
+                <a:spcPts val="200"/>
               </a:spcAft>
               <a:defRPr sz="1000" b="0">
                 <a:solidFill>
-                  <a:srgbClr val="253746"/>
-                </a:solidFill>
-                <a:latin typeface="Aptos"/>
-              </a:defRPr>
-            </a:pPr>
-            <a:r>
-              <a:t>Observed support is in the appendix; residual ribbons describe fitted-point errors, not future-sample prediction coverage.</a:t>
+                  <a:srgbClr val="627482"/>
+                </a:solidFill>
+                <a:latin typeface="Arial"/>
+              </a:defRPr>
+            </a:pPr>
+            <a:r>
+              <a:t>строго / описательно</a:t>
+            </a:r>
+          </a:p>
+        </p:txBody>
+      </p:sp>
+      <p:sp>
+        <p:nvSpPr>
+          <p:cNvPr id="11" name="TextBox 10"/>
+          <p:cNvSpPr txBox="1"/>
+          <p:nvPr/>
+        </p:nvSpPr>
+        <p:spPr>
+          <a:xfrm>
+            <a:off x="594360" y="2441448"/>
+            <a:ext cx="2240280" cy="310896"/>
+          </a:xfrm>
+          <a:prstGeom prst="rect">
+            <a:avLst/>
+          </a:prstGeom>
+          <a:noFill/>
+        </p:spPr>
+        <p:txBody>
+          <a:bodyPr wrap="square" lIns="13716" tIns="4572" rIns="13716" bIns="4572">
+            <a:spAutoFit/>
+          </a:bodyPr>
+          <a:lstStyle/>
+          <a:p>
+            <a:pPr>
+              <a:spcAft>
+                <a:spcPts val="200"/>
+              </a:spcAft>
+              <a:defRPr sz="1700" b="1">
+                <a:solidFill>
+                  <a:srgbClr val="087F79"/>
+                </a:solidFill>
+                <a:latin typeface="Arial"/>
+              </a:defRPr>
+            </a:pPr>
+            <a:r>
+              <a:t>VG m=1</a:t>
+            </a:r>
+          </a:p>
+        </p:txBody>
+      </p:sp>
+      <p:sp>
+        <p:nvSpPr>
+          <p:cNvPr id="12" name="TextBox 11"/>
+          <p:cNvSpPr txBox="1"/>
+          <p:nvPr/>
+        </p:nvSpPr>
+        <p:spPr>
+          <a:xfrm>
+            <a:off x="2880360" y="2423160"/>
+            <a:ext cx="1325880" cy="365760"/>
+          </a:xfrm>
+          <a:prstGeom prst="rect">
+            <a:avLst/>
+          </a:prstGeom>
+          <a:noFill/>
+        </p:spPr>
+        <p:txBody>
+          <a:bodyPr wrap="square" lIns="13716" tIns="4572" rIns="13716" bIns="4572">
+            <a:spAutoFit/>
+          </a:bodyPr>
+          <a:lstStyle/>
+          <a:p>
+            <a:pPr>
+              <a:spcAft>
+                <a:spcPts val="200"/>
+              </a:spcAft>
+              <a:defRPr sz="2000" b="1">
+                <a:solidFill>
+                  <a:srgbClr val="087F79"/>
+                </a:solidFill>
+                <a:latin typeface="Arial"/>
+              </a:defRPr>
+            </a:pPr>
+            <a:r>
+              <a:t>0.007472</a:t>
+            </a:r>
+          </a:p>
+        </p:txBody>
+      </p:sp>
+      <p:sp>
+        <p:nvSpPr>
+          <p:cNvPr id="13" name="TextBox 12"/>
+          <p:cNvSpPr txBox="1"/>
+          <p:nvPr/>
+        </p:nvSpPr>
+        <p:spPr>
+          <a:xfrm>
+            <a:off x="4297680" y="2459736"/>
+            <a:ext cx="1417320" cy="274320"/>
+          </a:xfrm>
+          <a:prstGeom prst="rect">
+            <a:avLst/>
+          </a:prstGeom>
+          <a:noFill/>
+        </p:spPr>
+        <p:txBody>
+          <a:bodyPr wrap="square" lIns="13716" tIns="4572" rIns="13716" bIns="4572">
+            <a:spAutoFit/>
+          </a:bodyPr>
+          <a:lstStyle/>
+          <a:p>
+            <a:pPr>
+              <a:spcAft>
+                <a:spcPts val="200"/>
+              </a:spcAft>
+              <a:defRPr sz="1400" b="0">
+                <a:solidFill>
+                  <a:srgbClr val="627482"/>
+                </a:solidFill>
+                <a:latin typeface="Arial"/>
+              </a:defRPr>
+            </a:pPr>
+            <a:r>
+              <a:t>69/76   76/76</a:t>
+            </a:r>
+          </a:p>
+        </p:txBody>
+      </p:sp>
+      <p:sp>
+        <p:nvSpPr>
+          <p:cNvPr id="14" name="TextBox 13"/>
+          <p:cNvSpPr txBox="1"/>
+          <p:nvPr/>
+        </p:nvSpPr>
+        <p:spPr>
+          <a:xfrm>
+            <a:off x="594360" y="2907791"/>
+            <a:ext cx="2240280" cy="310896"/>
+          </a:xfrm>
+          <a:prstGeom prst="rect">
+            <a:avLst/>
+          </a:prstGeom>
+          <a:noFill/>
+        </p:spPr>
+        <p:txBody>
+          <a:bodyPr wrap="square" lIns="13716" tIns="4572" rIns="13716" bIns="4572">
+            <a:spAutoFit/>
+          </a:bodyPr>
+          <a:lstStyle/>
+          <a:p>
+            <a:pPr>
+              <a:spcAft>
+                <a:spcPts val="200"/>
+              </a:spcAft>
+              <a:defRPr sz="1700" b="0">
+                <a:solidFill>
+                  <a:srgbClr val="193447"/>
+                </a:solidFill>
+                <a:latin typeface="Arial"/>
+              </a:defRPr>
+            </a:pPr>
+            <a:r>
+              <a:t>VG–Mualem</a:t>
+            </a:r>
+          </a:p>
+        </p:txBody>
+      </p:sp>
+      <p:sp>
+        <p:nvSpPr>
+          <p:cNvPr id="15" name="TextBox 14"/>
+          <p:cNvSpPr txBox="1"/>
+          <p:nvPr/>
+        </p:nvSpPr>
+        <p:spPr>
+          <a:xfrm>
+            <a:off x="2880360" y="2889503"/>
+            <a:ext cx="1325880" cy="365760"/>
+          </a:xfrm>
+          <a:prstGeom prst="rect">
+            <a:avLst/>
+          </a:prstGeom>
+          <a:noFill/>
+        </p:spPr>
+        <p:txBody>
+          <a:bodyPr wrap="square" lIns="13716" tIns="4572" rIns="13716" bIns="4572">
+            <a:spAutoFit/>
+          </a:bodyPr>
+          <a:lstStyle/>
+          <a:p>
+            <a:pPr>
+              <a:spcAft>
+                <a:spcPts val="200"/>
+              </a:spcAft>
+              <a:defRPr sz="2000" b="0">
+                <a:solidFill>
+                  <a:srgbClr val="193447"/>
+                </a:solidFill>
+                <a:latin typeface="Arial"/>
+              </a:defRPr>
+            </a:pPr>
+            <a:r>
+              <a:t>0.008226</a:t>
+            </a:r>
+          </a:p>
+        </p:txBody>
+      </p:sp>
+      <p:sp>
+        <p:nvSpPr>
+          <p:cNvPr id="16" name="TextBox 15"/>
+          <p:cNvSpPr txBox="1"/>
+          <p:nvPr/>
+        </p:nvSpPr>
+        <p:spPr>
+          <a:xfrm>
+            <a:off x="4297680" y="2926079"/>
+            <a:ext cx="1417320" cy="274320"/>
+          </a:xfrm>
+          <a:prstGeom prst="rect">
+            <a:avLst/>
+          </a:prstGeom>
+          <a:noFill/>
+        </p:spPr>
+        <p:txBody>
+          <a:bodyPr wrap="square" lIns="13716" tIns="4572" rIns="13716" bIns="4572">
+            <a:spAutoFit/>
+          </a:bodyPr>
+          <a:lstStyle/>
+          <a:p>
+            <a:pPr>
+              <a:spcAft>
+                <a:spcPts val="200"/>
+              </a:spcAft>
+              <a:defRPr sz="1400" b="0">
+                <a:solidFill>
+                  <a:srgbClr val="627482"/>
+                </a:solidFill>
+                <a:latin typeface="Arial"/>
+              </a:defRPr>
+            </a:pPr>
+            <a:r>
+              <a:t>75/76   76/76</a:t>
+            </a:r>
+          </a:p>
+        </p:txBody>
+      </p:sp>
+      <p:sp>
+        <p:nvSpPr>
+          <p:cNvPr id="17" name="TextBox 16"/>
+          <p:cNvSpPr txBox="1"/>
+          <p:nvPr/>
+        </p:nvSpPr>
+        <p:spPr>
+          <a:xfrm>
+            <a:off x="594360" y="3374136"/>
+            <a:ext cx="2240280" cy="310896"/>
+          </a:xfrm>
+          <a:prstGeom prst="rect">
+            <a:avLst/>
+          </a:prstGeom>
+          <a:noFill/>
+        </p:spPr>
+        <p:txBody>
+          <a:bodyPr wrap="square" lIns="13716" tIns="4572" rIns="13716" bIns="4572">
+            <a:spAutoFit/>
+          </a:bodyPr>
+          <a:lstStyle/>
+          <a:p>
+            <a:pPr>
+              <a:spcAft>
+                <a:spcPts val="200"/>
+              </a:spcAft>
+              <a:defRPr sz="1700" b="0">
+                <a:solidFill>
+                  <a:srgbClr val="193447"/>
+                </a:solidFill>
+                <a:latin typeface="Arial"/>
+              </a:defRPr>
+            </a:pPr>
+            <a:r>
+              <a:t>Brooks–Corey</a:t>
+            </a:r>
+          </a:p>
+        </p:txBody>
+      </p:sp>
+      <p:sp>
+        <p:nvSpPr>
+          <p:cNvPr id="18" name="TextBox 17"/>
+          <p:cNvSpPr txBox="1"/>
+          <p:nvPr/>
+        </p:nvSpPr>
+        <p:spPr>
+          <a:xfrm>
+            <a:off x="2880360" y="3355848"/>
+            <a:ext cx="1325880" cy="365760"/>
+          </a:xfrm>
+          <a:prstGeom prst="rect">
+            <a:avLst/>
+          </a:prstGeom>
+          <a:noFill/>
+        </p:spPr>
+        <p:txBody>
+          <a:bodyPr wrap="square" lIns="13716" tIns="4572" rIns="13716" bIns="4572">
+            <a:spAutoFit/>
+          </a:bodyPr>
+          <a:lstStyle/>
+          <a:p>
+            <a:pPr>
+              <a:spcAft>
+                <a:spcPts val="200"/>
+              </a:spcAft>
+              <a:defRPr sz="2000" b="0">
+                <a:solidFill>
+                  <a:srgbClr val="193447"/>
+                </a:solidFill>
+                <a:latin typeface="Arial"/>
+              </a:defRPr>
+            </a:pPr>
+            <a:r>
+              <a:t>0.010739</a:t>
+            </a:r>
+          </a:p>
+        </p:txBody>
+      </p:sp>
+      <p:sp>
+        <p:nvSpPr>
+          <p:cNvPr id="19" name="TextBox 18"/>
+          <p:cNvSpPr txBox="1"/>
+          <p:nvPr/>
+        </p:nvSpPr>
+        <p:spPr>
+          <a:xfrm>
+            <a:off x="4297680" y="3392424"/>
+            <a:ext cx="1417320" cy="274320"/>
+          </a:xfrm>
+          <a:prstGeom prst="rect">
+            <a:avLst/>
+          </a:prstGeom>
+          <a:noFill/>
+        </p:spPr>
+        <p:txBody>
+          <a:bodyPr wrap="square" lIns="13716" tIns="4572" rIns="13716" bIns="4572">
+            <a:spAutoFit/>
+          </a:bodyPr>
+          <a:lstStyle/>
+          <a:p>
+            <a:pPr>
+              <a:spcAft>
+                <a:spcPts val="200"/>
+              </a:spcAft>
+              <a:defRPr sz="1400" b="0">
+                <a:solidFill>
+                  <a:srgbClr val="627482"/>
+                </a:solidFill>
+                <a:latin typeface="Arial"/>
+              </a:defRPr>
+            </a:pPr>
+            <a:r>
+              <a:t>75/76   76/76</a:t>
+            </a:r>
+          </a:p>
+        </p:txBody>
+      </p:sp>
+      <p:sp>
+        <p:nvSpPr>
+          <p:cNvPr id="20" name="TextBox 19"/>
+          <p:cNvSpPr txBox="1"/>
+          <p:nvPr/>
+        </p:nvSpPr>
+        <p:spPr>
+          <a:xfrm>
+            <a:off x="594360" y="3840480"/>
+            <a:ext cx="2240280" cy="310896"/>
+          </a:xfrm>
+          <a:prstGeom prst="rect">
+            <a:avLst/>
+          </a:prstGeom>
+          <a:noFill/>
+        </p:spPr>
+        <p:txBody>
+          <a:bodyPr wrap="square" lIns="13716" tIns="4572" rIns="13716" bIns="4572">
+            <a:spAutoFit/>
+          </a:bodyPr>
+          <a:lstStyle/>
+          <a:p>
+            <a:pPr>
+              <a:spcAft>
+                <a:spcPts val="200"/>
+              </a:spcAft>
+              <a:defRPr sz="1700" b="0">
+                <a:solidFill>
+                  <a:srgbClr val="193447"/>
+                </a:solidFill>
+                <a:latin typeface="Arial"/>
+              </a:defRPr>
+            </a:pPr>
+            <a:r>
+              <a:t>Clapp</a:t>
+            </a:r>
+          </a:p>
+        </p:txBody>
+      </p:sp>
+      <p:sp>
+        <p:nvSpPr>
+          <p:cNvPr id="21" name="TextBox 20"/>
+          <p:cNvSpPr txBox="1"/>
+          <p:nvPr/>
+        </p:nvSpPr>
+        <p:spPr>
+          <a:xfrm>
+            <a:off x="2880360" y="3822192"/>
+            <a:ext cx="1325880" cy="365760"/>
+          </a:xfrm>
+          <a:prstGeom prst="rect">
+            <a:avLst/>
+          </a:prstGeom>
+          <a:noFill/>
+        </p:spPr>
+        <p:txBody>
+          <a:bodyPr wrap="square" lIns="13716" tIns="4572" rIns="13716" bIns="4572">
+            <a:spAutoFit/>
+          </a:bodyPr>
+          <a:lstStyle/>
+          <a:p>
+            <a:pPr>
+              <a:spcAft>
+                <a:spcPts val="200"/>
+              </a:spcAft>
+              <a:defRPr sz="2000" b="0">
+                <a:solidFill>
+                  <a:srgbClr val="193447"/>
+                </a:solidFill>
+                <a:latin typeface="Arial"/>
+              </a:defRPr>
+            </a:pPr>
+            <a:r>
+              <a:t>0.011478</a:t>
+            </a:r>
+          </a:p>
+        </p:txBody>
+      </p:sp>
+      <p:sp>
+        <p:nvSpPr>
+          <p:cNvPr id="22" name="TextBox 21"/>
+          <p:cNvSpPr txBox="1"/>
+          <p:nvPr/>
+        </p:nvSpPr>
+        <p:spPr>
+          <a:xfrm>
+            <a:off x="4297680" y="3858768"/>
+            <a:ext cx="1417320" cy="274320"/>
+          </a:xfrm>
+          <a:prstGeom prst="rect">
+            <a:avLst/>
+          </a:prstGeom>
+          <a:noFill/>
+        </p:spPr>
+        <p:txBody>
+          <a:bodyPr wrap="square" lIns="13716" tIns="4572" rIns="13716" bIns="4572">
+            <a:spAutoFit/>
+          </a:bodyPr>
+          <a:lstStyle/>
+          <a:p>
+            <a:pPr>
+              <a:spcAft>
+                <a:spcPts val="200"/>
+              </a:spcAft>
+              <a:defRPr sz="1400" b="0">
+                <a:solidFill>
+                  <a:srgbClr val="627482"/>
+                </a:solidFill>
+                <a:latin typeface="Arial"/>
+              </a:defRPr>
+            </a:pPr>
+            <a:r>
+              <a:t>63/76   76/76</a:t>
+            </a:r>
+          </a:p>
+        </p:txBody>
+      </p:sp>
+      <p:sp>
+        <p:nvSpPr>
+          <p:cNvPr id="23" name="Rounded Rectangle 22"/>
+          <p:cNvSpPr/>
+          <p:nvPr/>
+        </p:nvSpPr>
+        <p:spPr>
+          <a:xfrm>
+            <a:off x="6263640" y="1353312"/>
+            <a:ext cx="5504688" cy="3136392"/>
+          </a:xfrm>
+          <a:prstGeom prst="roundRect">
+            <a:avLst>
+              <a:gd name="adj" fmla="val 8000"/>
+            </a:avLst>
+          </a:prstGeom>
+          <a:solidFill>
+            <a:srgbClr val="F0F6F7"/>
+          </a:solidFill>
+          <a:ln>
+            <a:noFill/>
+          </a:ln>
+        </p:spPr>
+        <p:style>
+          <a:lnRef idx="1">
+            <a:schemeClr val="accent1"/>
+          </a:lnRef>
+          <a:fillRef idx="3">
+            <a:schemeClr val="accent1"/>
+          </a:fillRef>
+          <a:effectRef idx="2">
+            <a:schemeClr val="accent1"/>
+          </a:effectRef>
+          <a:fontRef idx="minor">
+            <a:schemeClr val="lt1"/>
+          </a:fontRef>
+        </p:style>
+        <p:txBody>
+          <a:bodyPr rtlCol="0" anchor="ctr"/>
+          <a:lstStyle/>
+          <a:p>
+            <a:pPr algn="ctr"/>
+            <a:endParaRPr/>
+          </a:p>
+        </p:txBody>
+      </p:sp>
+      <p:sp>
+        <p:nvSpPr>
+          <p:cNvPr id="24" name="TextBox 23"/>
+          <p:cNvSpPr txBox="1"/>
+          <p:nvPr/>
+        </p:nvSpPr>
+        <p:spPr>
+          <a:xfrm>
+            <a:off x="6446520" y="1517904"/>
+            <a:ext cx="5120640" cy="365760"/>
+          </a:xfrm>
+          <a:prstGeom prst="rect">
+            <a:avLst/>
+          </a:prstGeom>
+          <a:noFill/>
+        </p:spPr>
+        <p:txBody>
+          <a:bodyPr wrap="square" lIns="13716" tIns="4572" rIns="13716" bIns="4572">
+            <a:spAutoFit/>
+          </a:bodyPr>
+          <a:lstStyle/>
+          <a:p>
+            <a:pPr>
+              <a:spcAft>
+                <a:spcPts val="200"/>
+              </a:spcAft>
+              <a:defRPr sz="1900" b="1">
+                <a:solidFill>
+                  <a:srgbClr val="193447"/>
+                </a:solidFill>
+                <a:latin typeface="Arial"/>
+              </a:defRPr>
+            </a:pPr>
+            <a:r>
+              <a:t>Массовая влажность • кг/кг • N=65</a:t>
+            </a:r>
+          </a:p>
+        </p:txBody>
+      </p:sp>
+      <p:sp>
+        <p:nvSpPr>
+          <p:cNvPr id="25" name="TextBox 24"/>
+          <p:cNvSpPr txBox="1"/>
+          <p:nvPr/>
+        </p:nvSpPr>
+        <p:spPr>
+          <a:xfrm>
+            <a:off x="6446520" y="1993392"/>
+            <a:ext cx="2221992" cy="274320"/>
+          </a:xfrm>
+          <a:prstGeom prst="rect">
+            <a:avLst/>
+          </a:prstGeom>
+          <a:noFill/>
+        </p:spPr>
+        <p:txBody>
+          <a:bodyPr wrap="square" lIns="13716" tIns="4572" rIns="13716" bIns="4572">
+            <a:spAutoFit/>
+          </a:bodyPr>
+          <a:lstStyle/>
+          <a:p>
+            <a:pPr>
+              <a:spcAft>
+                <a:spcPts val="200"/>
+              </a:spcAft>
+              <a:defRPr sz="1200" b="0">
+                <a:solidFill>
+                  <a:srgbClr val="627482"/>
+                </a:solidFill>
+                <a:latin typeface="Arial"/>
+              </a:defRPr>
+            </a:pPr>
+            <a:r>
+              <a:t>Семейство</a:t>
+            </a:r>
+          </a:p>
+        </p:txBody>
+      </p:sp>
+      <p:sp>
+        <p:nvSpPr>
+          <p:cNvPr id="26" name="TextBox 25"/>
+          <p:cNvSpPr txBox="1"/>
+          <p:nvPr/>
+        </p:nvSpPr>
+        <p:spPr>
+          <a:xfrm>
+            <a:off x="8732520" y="1993392"/>
+            <a:ext cx="1280160" cy="274320"/>
+          </a:xfrm>
+          <a:prstGeom prst="rect">
+            <a:avLst/>
+          </a:prstGeom>
+          <a:noFill/>
+        </p:spPr>
+        <p:txBody>
+          <a:bodyPr wrap="square" lIns="13716" tIns="4572" rIns="13716" bIns="4572">
+            <a:spAutoFit/>
+          </a:bodyPr>
+          <a:lstStyle/>
+          <a:p>
+            <a:pPr>
+              <a:spcAft>
+                <a:spcPts val="200"/>
+              </a:spcAft>
+              <a:defRPr sz="1200" b="0">
+                <a:solidFill>
+                  <a:srgbClr val="627482"/>
+                </a:solidFill>
+                <a:latin typeface="Arial"/>
+              </a:defRPr>
+            </a:pPr>
+            <a:r>
+              <a:t>Median RMSE</a:t>
+            </a:r>
+          </a:p>
+        </p:txBody>
+      </p:sp>
+      <p:sp>
+        <p:nvSpPr>
+          <p:cNvPr id="27" name="TextBox 26"/>
+          <p:cNvSpPr txBox="1"/>
+          <p:nvPr/>
+        </p:nvSpPr>
+        <p:spPr>
+          <a:xfrm>
+            <a:off x="10149840" y="1920240"/>
+            <a:ext cx="1417320" cy="438912"/>
+          </a:xfrm>
+          <a:prstGeom prst="rect">
+            <a:avLst/>
+          </a:prstGeom>
+          <a:noFill/>
+        </p:spPr>
+        <p:txBody>
+          <a:bodyPr wrap="square" lIns="13716" tIns="4572" rIns="13716" bIns="4572">
+            <a:spAutoFit/>
+          </a:bodyPr>
+          <a:lstStyle/>
+          <a:p>
+            <a:pPr>
+              <a:spcAft>
+                <a:spcPts val="200"/>
+              </a:spcAft>
+              <a:defRPr sz="1000" b="0">
+                <a:solidFill>
+                  <a:srgbClr val="627482"/>
+                </a:solidFill>
+                <a:latin typeface="Arial"/>
+              </a:defRPr>
+            </a:pPr>
+            <a:r>
+              <a:t>Успех fit</a:t>
+            </a:r>
+          </a:p>
+          <a:p>
+            <a:pPr>
+              <a:spcAft>
+                <a:spcPts val="200"/>
+              </a:spcAft>
+              <a:defRPr sz="1000" b="0">
+                <a:solidFill>
+                  <a:srgbClr val="627482"/>
+                </a:solidFill>
+                <a:latin typeface="Arial"/>
+              </a:defRPr>
+            </a:pPr>
+            <a:r>
+              <a:t>строго / описательно</a:t>
+            </a:r>
+          </a:p>
+        </p:txBody>
+      </p:sp>
+      <p:sp>
+        <p:nvSpPr>
+          <p:cNvPr id="28" name="TextBox 27"/>
+          <p:cNvSpPr txBox="1"/>
+          <p:nvPr/>
+        </p:nvSpPr>
+        <p:spPr>
+          <a:xfrm>
+            <a:off x="6446520" y="2441448"/>
+            <a:ext cx="2240280" cy="310896"/>
+          </a:xfrm>
+          <a:prstGeom prst="rect">
+            <a:avLst/>
+          </a:prstGeom>
+          <a:noFill/>
+        </p:spPr>
+        <p:txBody>
+          <a:bodyPr wrap="square" lIns="13716" tIns="4572" rIns="13716" bIns="4572">
+            <a:spAutoFit/>
+          </a:bodyPr>
+          <a:lstStyle/>
+          <a:p>
+            <a:pPr>
+              <a:spcAft>
+                <a:spcPts val="200"/>
+              </a:spcAft>
+              <a:defRPr sz="1700" b="1">
+                <a:solidFill>
+                  <a:srgbClr val="087F79"/>
+                </a:solidFill>
+                <a:latin typeface="Arial"/>
+              </a:defRPr>
+            </a:pPr>
+            <a:r>
+              <a:t>VG m=1</a:t>
+            </a:r>
+          </a:p>
+        </p:txBody>
+      </p:sp>
+      <p:sp>
+        <p:nvSpPr>
+          <p:cNvPr id="29" name="TextBox 28"/>
+          <p:cNvSpPr txBox="1"/>
+          <p:nvPr/>
+        </p:nvSpPr>
+        <p:spPr>
+          <a:xfrm>
+            <a:off x="8732520" y="2423160"/>
+            <a:ext cx="1325880" cy="365760"/>
+          </a:xfrm>
+          <a:prstGeom prst="rect">
+            <a:avLst/>
+          </a:prstGeom>
+          <a:noFill/>
+        </p:spPr>
+        <p:txBody>
+          <a:bodyPr wrap="square" lIns="13716" tIns="4572" rIns="13716" bIns="4572">
+            <a:spAutoFit/>
+          </a:bodyPr>
+          <a:lstStyle/>
+          <a:p>
+            <a:pPr>
+              <a:spcAft>
+                <a:spcPts val="200"/>
+              </a:spcAft>
+              <a:defRPr sz="2000" b="1">
+                <a:solidFill>
+                  <a:srgbClr val="087F79"/>
+                </a:solidFill>
+                <a:latin typeface="Arial"/>
+              </a:defRPr>
+            </a:pPr>
+            <a:r>
+              <a:t>0.009073</a:t>
+            </a:r>
+          </a:p>
+        </p:txBody>
+      </p:sp>
+      <p:sp>
+        <p:nvSpPr>
+          <p:cNvPr id="30" name="TextBox 29"/>
+          <p:cNvSpPr txBox="1"/>
+          <p:nvPr/>
+        </p:nvSpPr>
+        <p:spPr>
+          <a:xfrm>
+            <a:off x="10149840" y="2459736"/>
+            <a:ext cx="1417320" cy="274320"/>
+          </a:xfrm>
+          <a:prstGeom prst="rect">
+            <a:avLst/>
+          </a:prstGeom>
+          <a:noFill/>
+        </p:spPr>
+        <p:txBody>
+          <a:bodyPr wrap="square" lIns="13716" tIns="4572" rIns="13716" bIns="4572">
+            <a:spAutoFit/>
+          </a:bodyPr>
+          <a:lstStyle/>
+          <a:p>
+            <a:pPr>
+              <a:spcAft>
+                <a:spcPts val="200"/>
+              </a:spcAft>
+              <a:defRPr sz="1400" b="0">
+                <a:solidFill>
+                  <a:srgbClr val="627482"/>
+                </a:solidFill>
+                <a:latin typeface="Arial"/>
+              </a:defRPr>
+            </a:pPr>
+            <a:r>
+              <a:t>57/65   65/65</a:t>
+            </a:r>
+          </a:p>
+        </p:txBody>
+      </p:sp>
+      <p:sp>
+        <p:nvSpPr>
+          <p:cNvPr id="31" name="TextBox 30"/>
+          <p:cNvSpPr txBox="1"/>
+          <p:nvPr/>
+        </p:nvSpPr>
+        <p:spPr>
+          <a:xfrm>
+            <a:off x="6446520" y="2907791"/>
+            <a:ext cx="2240280" cy="310896"/>
+          </a:xfrm>
+          <a:prstGeom prst="rect">
+            <a:avLst/>
+          </a:prstGeom>
+          <a:noFill/>
+        </p:spPr>
+        <p:txBody>
+          <a:bodyPr wrap="square" lIns="13716" tIns="4572" rIns="13716" bIns="4572">
+            <a:spAutoFit/>
+          </a:bodyPr>
+          <a:lstStyle/>
+          <a:p>
+            <a:pPr>
+              <a:spcAft>
+                <a:spcPts val="200"/>
+              </a:spcAft>
+              <a:defRPr sz="1700" b="0">
+                <a:solidFill>
+                  <a:srgbClr val="193447"/>
+                </a:solidFill>
+                <a:latin typeface="Arial"/>
+              </a:defRPr>
+            </a:pPr>
+            <a:r>
+              <a:t>VG–Mualem</a:t>
+            </a:r>
+          </a:p>
+        </p:txBody>
+      </p:sp>
+      <p:sp>
+        <p:nvSpPr>
+          <p:cNvPr id="32" name="TextBox 31"/>
+          <p:cNvSpPr txBox="1"/>
+          <p:nvPr/>
+        </p:nvSpPr>
+        <p:spPr>
+          <a:xfrm>
+            <a:off x="8732520" y="2889503"/>
+            <a:ext cx="1325880" cy="365760"/>
+          </a:xfrm>
+          <a:prstGeom prst="rect">
+            <a:avLst/>
+          </a:prstGeom>
+          <a:noFill/>
+        </p:spPr>
+        <p:txBody>
+          <a:bodyPr wrap="square" lIns="13716" tIns="4572" rIns="13716" bIns="4572">
+            <a:spAutoFit/>
+          </a:bodyPr>
+          <a:lstStyle/>
+          <a:p>
+            <a:pPr>
+              <a:spcAft>
+                <a:spcPts val="200"/>
+              </a:spcAft>
+              <a:defRPr sz="2000" b="0">
+                <a:solidFill>
+                  <a:srgbClr val="193447"/>
+                </a:solidFill>
+                <a:latin typeface="Arial"/>
+              </a:defRPr>
+            </a:pPr>
+            <a:r>
+              <a:t>0.011576</a:t>
+            </a:r>
+          </a:p>
+        </p:txBody>
+      </p:sp>
+      <p:sp>
+        <p:nvSpPr>
+          <p:cNvPr id="33" name="TextBox 32"/>
+          <p:cNvSpPr txBox="1"/>
+          <p:nvPr/>
+        </p:nvSpPr>
+        <p:spPr>
+          <a:xfrm>
+            <a:off x="10149840" y="2926079"/>
+            <a:ext cx="1417320" cy="274320"/>
+          </a:xfrm>
+          <a:prstGeom prst="rect">
+            <a:avLst/>
+          </a:prstGeom>
+          <a:noFill/>
+        </p:spPr>
+        <p:txBody>
+          <a:bodyPr wrap="square" lIns="13716" tIns="4572" rIns="13716" bIns="4572">
+            <a:spAutoFit/>
+          </a:bodyPr>
+          <a:lstStyle/>
+          <a:p>
+            <a:pPr>
+              <a:spcAft>
+                <a:spcPts val="200"/>
+              </a:spcAft>
+              <a:defRPr sz="1400" b="0">
+                <a:solidFill>
+                  <a:srgbClr val="627482"/>
+                </a:solidFill>
+                <a:latin typeface="Arial"/>
+              </a:defRPr>
+            </a:pPr>
+            <a:r>
+              <a:t>61/65   65/65</a:t>
+            </a:r>
+          </a:p>
+        </p:txBody>
+      </p:sp>
+      <p:sp>
+        <p:nvSpPr>
+          <p:cNvPr id="34" name="TextBox 33"/>
+          <p:cNvSpPr txBox="1"/>
+          <p:nvPr/>
+        </p:nvSpPr>
+        <p:spPr>
+          <a:xfrm>
+            <a:off x="6446520" y="3374136"/>
+            <a:ext cx="2240280" cy="310896"/>
+          </a:xfrm>
+          <a:prstGeom prst="rect">
+            <a:avLst/>
+          </a:prstGeom>
+          <a:noFill/>
+        </p:spPr>
+        <p:txBody>
+          <a:bodyPr wrap="square" lIns="13716" tIns="4572" rIns="13716" bIns="4572">
+            <a:spAutoFit/>
+          </a:bodyPr>
+          <a:lstStyle/>
+          <a:p>
+            <a:pPr>
+              <a:spcAft>
+                <a:spcPts val="200"/>
+              </a:spcAft>
+              <a:defRPr sz="1700" b="0">
+                <a:solidFill>
+                  <a:srgbClr val="193447"/>
+                </a:solidFill>
+                <a:latin typeface="Arial"/>
+              </a:defRPr>
+            </a:pPr>
+            <a:r>
+              <a:t>Brooks–Corey</a:t>
+            </a:r>
+          </a:p>
+        </p:txBody>
+      </p:sp>
+      <p:sp>
+        <p:nvSpPr>
+          <p:cNvPr id="35" name="TextBox 34"/>
+          <p:cNvSpPr txBox="1"/>
+          <p:nvPr/>
+        </p:nvSpPr>
+        <p:spPr>
+          <a:xfrm>
+            <a:off x="8732520" y="3355848"/>
+            <a:ext cx="1325880" cy="365760"/>
+          </a:xfrm>
+          <a:prstGeom prst="rect">
+            <a:avLst/>
+          </a:prstGeom>
+          <a:noFill/>
+        </p:spPr>
+        <p:txBody>
+          <a:bodyPr wrap="square" lIns="13716" tIns="4572" rIns="13716" bIns="4572">
+            <a:spAutoFit/>
+          </a:bodyPr>
+          <a:lstStyle/>
+          <a:p>
+            <a:pPr>
+              <a:spcAft>
+                <a:spcPts val="200"/>
+              </a:spcAft>
+              <a:defRPr sz="2000" b="0">
+                <a:solidFill>
+                  <a:srgbClr val="193447"/>
+                </a:solidFill>
+                <a:latin typeface="Arial"/>
+              </a:defRPr>
+            </a:pPr>
+            <a:r>
+              <a:t>0.014410</a:t>
+            </a:r>
+          </a:p>
+        </p:txBody>
+      </p:sp>
+      <p:sp>
+        <p:nvSpPr>
+          <p:cNvPr id="36" name="TextBox 35"/>
+          <p:cNvSpPr txBox="1"/>
+          <p:nvPr/>
+        </p:nvSpPr>
+        <p:spPr>
+          <a:xfrm>
+            <a:off x="10149840" y="3392424"/>
+            <a:ext cx="1417320" cy="274320"/>
+          </a:xfrm>
+          <a:prstGeom prst="rect">
+            <a:avLst/>
+          </a:prstGeom>
+          <a:noFill/>
+        </p:spPr>
+        <p:txBody>
+          <a:bodyPr wrap="square" lIns="13716" tIns="4572" rIns="13716" bIns="4572">
+            <a:spAutoFit/>
+          </a:bodyPr>
+          <a:lstStyle/>
+          <a:p>
+            <a:pPr>
+              <a:spcAft>
+                <a:spcPts val="200"/>
+              </a:spcAft>
+              <a:defRPr sz="1400" b="0">
+                <a:solidFill>
+                  <a:srgbClr val="627482"/>
+                </a:solidFill>
+                <a:latin typeface="Arial"/>
+              </a:defRPr>
+            </a:pPr>
+            <a:r>
+              <a:t>65/65   65/65</a:t>
+            </a:r>
+          </a:p>
+        </p:txBody>
+      </p:sp>
+      <p:sp>
+        <p:nvSpPr>
+          <p:cNvPr id="37" name="TextBox 36"/>
+          <p:cNvSpPr txBox="1"/>
+          <p:nvPr/>
+        </p:nvSpPr>
+        <p:spPr>
+          <a:xfrm>
+            <a:off x="6446520" y="3840480"/>
+            <a:ext cx="2240280" cy="310896"/>
+          </a:xfrm>
+          <a:prstGeom prst="rect">
+            <a:avLst/>
+          </a:prstGeom>
+          <a:noFill/>
+        </p:spPr>
+        <p:txBody>
+          <a:bodyPr wrap="square" lIns="13716" tIns="4572" rIns="13716" bIns="4572">
+            <a:spAutoFit/>
+          </a:bodyPr>
+          <a:lstStyle/>
+          <a:p>
+            <a:pPr>
+              <a:spcAft>
+                <a:spcPts val="200"/>
+              </a:spcAft>
+              <a:defRPr sz="1700" b="0">
+                <a:solidFill>
+                  <a:srgbClr val="193447"/>
+                </a:solidFill>
+                <a:latin typeface="Arial"/>
+              </a:defRPr>
+            </a:pPr>
+            <a:r>
+              <a:t>Clapp</a:t>
+            </a:r>
+          </a:p>
+        </p:txBody>
+      </p:sp>
+      <p:sp>
+        <p:nvSpPr>
+          <p:cNvPr id="38" name="TextBox 37"/>
+          <p:cNvSpPr txBox="1"/>
+          <p:nvPr/>
+        </p:nvSpPr>
+        <p:spPr>
+          <a:xfrm>
+            <a:off x="8732520" y="3822192"/>
+            <a:ext cx="1325880" cy="365760"/>
+          </a:xfrm>
+          <a:prstGeom prst="rect">
+            <a:avLst/>
+          </a:prstGeom>
+          <a:noFill/>
+        </p:spPr>
+        <p:txBody>
+          <a:bodyPr wrap="square" lIns="13716" tIns="4572" rIns="13716" bIns="4572">
+            <a:spAutoFit/>
+          </a:bodyPr>
+          <a:lstStyle/>
+          <a:p>
+            <a:pPr>
+              <a:spcAft>
+                <a:spcPts val="200"/>
+              </a:spcAft>
+              <a:defRPr sz="2000" b="0">
+                <a:solidFill>
+                  <a:srgbClr val="193447"/>
+                </a:solidFill>
+                <a:latin typeface="Arial"/>
+              </a:defRPr>
+            </a:pPr>
+            <a:r>
+              <a:t>0.016585</a:t>
+            </a:r>
+          </a:p>
+        </p:txBody>
+      </p:sp>
+      <p:sp>
+        <p:nvSpPr>
+          <p:cNvPr id="39" name="TextBox 38"/>
+          <p:cNvSpPr txBox="1"/>
+          <p:nvPr/>
+        </p:nvSpPr>
+        <p:spPr>
+          <a:xfrm>
+            <a:off x="10149840" y="3858768"/>
+            <a:ext cx="1417320" cy="274320"/>
+          </a:xfrm>
+          <a:prstGeom prst="rect">
+            <a:avLst/>
+          </a:prstGeom>
+          <a:noFill/>
+        </p:spPr>
+        <p:txBody>
+          <a:bodyPr wrap="square" lIns="13716" tIns="4572" rIns="13716" bIns="4572">
+            <a:spAutoFit/>
+          </a:bodyPr>
+          <a:lstStyle/>
+          <a:p>
+            <a:pPr>
+              <a:spcAft>
+                <a:spcPts val="200"/>
+              </a:spcAft>
+              <a:defRPr sz="1400" b="0">
+                <a:solidFill>
+                  <a:srgbClr val="627482"/>
+                </a:solidFill>
+                <a:latin typeface="Arial"/>
+              </a:defRPr>
+            </a:pPr>
+            <a:r>
+              <a:t>63/65   65/65</a:t>
+            </a:r>
+          </a:p>
+        </p:txBody>
+      </p:sp>
+      <p:sp>
+        <p:nvSpPr>
+          <p:cNvPr id="40" name="Rounded Rectangle 39"/>
+          <p:cNvSpPr/>
+          <p:nvPr/>
+        </p:nvSpPr>
+        <p:spPr>
+          <a:xfrm>
+            <a:off x="411480" y="4690872"/>
+            <a:ext cx="5504688" cy="1042415"/>
+          </a:xfrm>
+          <a:prstGeom prst="roundRect">
+            <a:avLst>
+              <a:gd name="adj" fmla="val 8000"/>
+            </a:avLst>
+          </a:prstGeom>
+          <a:solidFill>
+            <a:srgbClr val="F6F8FA"/>
+          </a:solidFill>
+          <a:ln>
+            <a:noFill/>
+          </a:ln>
+        </p:spPr>
+        <p:style>
+          <a:lnRef idx="1">
+            <a:schemeClr val="accent1"/>
+          </a:lnRef>
+          <a:fillRef idx="3">
+            <a:schemeClr val="accent1"/>
+          </a:fillRef>
+          <a:effectRef idx="2">
+            <a:schemeClr val="accent1"/>
+          </a:effectRef>
+          <a:fontRef idx="minor">
+            <a:schemeClr val="lt1"/>
+          </a:fontRef>
+        </p:style>
+        <p:txBody>
+          <a:bodyPr rtlCol="0" anchor="ctr"/>
+          <a:lstStyle/>
+          <a:p>
+            <a:pPr algn="ctr"/>
+            <a:endParaRPr/>
+          </a:p>
+        </p:txBody>
+      </p:sp>
+      <p:sp>
+        <p:nvSpPr>
+          <p:cNvPr id="41" name="Rounded Rectangle 40"/>
+          <p:cNvSpPr/>
+          <p:nvPr/>
+        </p:nvSpPr>
+        <p:spPr>
+          <a:xfrm>
+            <a:off x="6263640" y="4690872"/>
+            <a:ext cx="5504688" cy="1042415"/>
+          </a:xfrm>
+          <a:prstGeom prst="roundRect">
+            <a:avLst>
+              <a:gd name="adj" fmla="val 8000"/>
+            </a:avLst>
+          </a:prstGeom>
+          <a:solidFill>
+            <a:srgbClr val="F6F8FA"/>
+          </a:solidFill>
+          <a:ln>
+            <a:noFill/>
+          </a:ln>
+        </p:spPr>
+        <p:style>
+          <a:lnRef idx="1">
+            <a:schemeClr val="accent1"/>
+          </a:lnRef>
+          <a:fillRef idx="3">
+            <a:schemeClr val="accent1"/>
+          </a:fillRef>
+          <a:effectRef idx="2">
+            <a:schemeClr val="accent1"/>
+          </a:effectRef>
+          <a:fontRef idx="minor">
+            <a:schemeClr val="lt1"/>
+          </a:fontRef>
+        </p:style>
+        <p:txBody>
+          <a:bodyPr rtlCol="0" anchor="ctr"/>
+          <a:lstStyle/>
+          <a:p>
+            <a:pPr algn="ctr"/>
+            <a:endParaRPr/>
+          </a:p>
+        </p:txBody>
+      </p:sp>
+      <p:sp>
+        <p:nvSpPr>
+          <p:cNvPr id="42" name="TextBox 41"/>
+          <p:cNvSpPr txBox="1"/>
+          <p:nvPr/>
+        </p:nvSpPr>
+        <p:spPr>
+          <a:xfrm>
+            <a:off x="594360" y="4818888"/>
+            <a:ext cx="5120640" cy="237744"/>
+          </a:xfrm>
+          <a:prstGeom prst="rect">
+            <a:avLst/>
+          </a:prstGeom>
+          <a:noFill/>
+        </p:spPr>
+        <p:txBody>
+          <a:bodyPr wrap="square" lIns="13716" tIns="4572" rIns="13716" bIns="4572">
+            <a:spAutoFit/>
+          </a:bodyPr>
+          <a:lstStyle/>
+          <a:p>
+            <a:pPr>
+              <a:spcAft>
+                <a:spcPts val="200"/>
+              </a:spcAft>
+              <a:defRPr sz="1300" b="1">
+                <a:solidFill>
+                  <a:srgbClr val="193447"/>
+                </a:solidFill>
+                <a:latin typeface="Arial"/>
+              </a:defRPr>
+            </a:pPr>
+            <a:r>
+              <a:t>Экспериментальная поддержка строгих VG m=1 fit</a:t>
+            </a:r>
+          </a:p>
+        </p:txBody>
+      </p:sp>
+      <p:sp>
+        <p:nvSpPr>
+          <p:cNvPr id="43" name="TextBox 42"/>
+          <p:cNvSpPr txBox="1"/>
+          <p:nvPr/>
+        </p:nvSpPr>
+        <p:spPr>
+          <a:xfrm>
+            <a:off x="594360" y="5166360"/>
+            <a:ext cx="5120640" cy="422656"/>
+          </a:xfrm>
+          <a:prstGeom prst="rect">
+            <a:avLst/>
+          </a:prstGeom>
+          <a:noFill/>
+        </p:spPr>
+        <p:txBody>
+          <a:bodyPr wrap="square" lIns="13716" tIns="4572" rIns="13716" bIns="4572">
+            <a:spAutoFit/>
+          </a:bodyPr>
+          <a:lstStyle/>
+          <a:p>
+            <a:pPr>
+              <a:spcAft>
+                <a:spcPts val="200"/>
+              </a:spcAft>
+              <a:defRPr sz="1200" b="0">
+                <a:solidFill>
+                  <a:srgbClr val="627482"/>
+                </a:solidFill>
+                <a:latin typeface="Arial"/>
+              </a:defRPr>
+            </a:pPr>
+            <a:r>
+              <a:t>Объёмная: 0–9.81×10⁶ кПа; массовая: 0–3.10×10⁵ кПа</a:t>
+            </a:r>
+          </a:p>
+          <a:p>
+            <a:pPr>
+              <a:spcAft>
+                <a:spcPts val="200"/>
+              </a:spcAft>
+              <a:defRPr sz="1200" b="0">
+                <a:solidFill>
+                  <a:srgbClr val="627482"/>
+                </a:solidFill>
+                <a:latin typeface="Arial"/>
+              </a:defRPr>
+            </a:pPr>
+            <a:r>
+              <a:t>Поддержка не является доверительным / прогнозным интервалом</a:t>
+            </a:r>
+          </a:p>
+        </p:txBody>
+      </p:sp>
+      <p:sp>
+        <p:nvSpPr>
+          <p:cNvPr id="44" name="TextBox 43"/>
+          <p:cNvSpPr txBox="1"/>
+          <p:nvPr/>
+        </p:nvSpPr>
+        <p:spPr>
+          <a:xfrm>
+            <a:off x="6446520" y="4818888"/>
+            <a:ext cx="5120640" cy="237744"/>
+          </a:xfrm>
+          <a:prstGeom prst="rect">
+            <a:avLst/>
+          </a:prstGeom>
+          <a:noFill/>
+        </p:spPr>
+        <p:txBody>
+          <a:bodyPr wrap="square" lIns="13716" tIns="4572" rIns="13716" bIns="4572">
+            <a:spAutoFit/>
+          </a:bodyPr>
+          <a:lstStyle/>
+          <a:p>
+            <a:pPr>
+              <a:spcAft>
+                <a:spcPts val="200"/>
+              </a:spcAft>
+              <a:defRPr sz="1300" b="1">
+                <a:solidFill>
+                  <a:srgbClr val="193447"/>
+                </a:solidFill>
+                <a:latin typeface="Arial"/>
+              </a:defRPr>
+            </a:pPr>
+            <a:r>
+              <a:t>Ошибка VG m=1 зависит от давления</a:t>
+            </a:r>
+          </a:p>
+        </p:txBody>
+      </p:sp>
+      <p:sp>
+        <p:nvSpPr>
+          <p:cNvPr id="45" name="TextBox 44"/>
+          <p:cNvSpPr txBox="1"/>
+          <p:nvPr/>
+        </p:nvSpPr>
+        <p:spPr>
+          <a:xfrm>
+            <a:off x="6446520" y="5166360"/>
+            <a:ext cx="5120640" cy="422656"/>
+          </a:xfrm>
+          <a:prstGeom prst="rect">
+            <a:avLst/>
+          </a:prstGeom>
+          <a:noFill/>
+        </p:spPr>
+        <p:txBody>
+          <a:bodyPr wrap="square" lIns="13716" tIns="4572" rIns="13716" bIns="4572">
+            <a:spAutoFit/>
+          </a:bodyPr>
+          <a:lstStyle/>
+          <a:p>
+            <a:pPr>
+              <a:spcAft>
+                <a:spcPts val="200"/>
+              </a:spcAft>
+              <a:defRPr sz="1200" b="0">
+                <a:solidFill>
+                  <a:srgbClr val="627482"/>
+                </a:solidFill>
+                <a:latin typeface="Arial"/>
+              </a:defRPr>
+            </a:pPr>
+            <a:r>
+              <a:t>Минимальная наблюдаемая MAE: объёмная — p&lt;10 кПа (N=76);</a:t>
+            </a:r>
+          </a:p>
+          <a:p>
+            <a:pPr>
+              <a:spcAft>
+                <a:spcPts val="200"/>
+              </a:spcAft>
+              <a:defRPr sz="1200" b="0">
+                <a:solidFill>
+                  <a:srgbClr val="627482"/>
+                </a:solidFill>
+                <a:latin typeface="Arial"/>
+              </a:defRPr>
+            </a:pPr>
+            <a:r>
+              <a:t>массовая — p≥1500 кПа (N=37). Это описательные закономерности.</a:t>
+            </a:r>
+          </a:p>
+        </p:txBody>
+      </p:sp>
+      <p:sp>
+        <p:nvSpPr>
+          <p:cNvPr id="46" name="TextBox 45"/>
+          <p:cNvSpPr txBox="1"/>
+          <p:nvPr/>
+        </p:nvSpPr>
+        <p:spPr>
+          <a:xfrm>
+            <a:off x="429768" y="5943600"/>
+            <a:ext cx="11247120" cy="546608"/>
+          </a:xfrm>
+          <a:prstGeom prst="rect">
+            <a:avLst/>
+          </a:prstGeom>
+          <a:noFill/>
+        </p:spPr>
+        <p:txBody>
+          <a:bodyPr wrap="square" lIns="13716" tIns="4572" rIns="13716" bIns="4572">
+            <a:spAutoFit/>
+          </a:bodyPr>
+          <a:lstStyle/>
+          <a:p>
+            <a:pPr>
+              <a:spcAft>
+                <a:spcPts val="200"/>
+              </a:spcAft>
+              <a:defRPr sz="1600" b="1">
+                <a:solidFill>
+                  <a:srgbClr val="193447"/>
+                </a:solidFill>
+                <a:latin typeface="Arial"/>
+              </a:defRPr>
+            </a:pPr>
+            <a:r>
+              <a:t>VG m=1 — предпочтительная общая функция аппроксимации ОГХ; надёжность оценивается</a:t>
+            </a:r>
+          </a:p>
+          <a:p>
+            <a:pPr>
+              <a:spcAft>
+                <a:spcPts val="200"/>
+              </a:spcAft>
+              <a:defRPr sz="1600" b="1">
+                <a:solidFill>
+                  <a:srgbClr val="193447"/>
+                </a:solidFill>
+                <a:latin typeface="Arial"/>
+              </a:defRPr>
+            </a:pPr>
+            <a:r>
+              <a:t>с учётом экспериментальной поддержки давлений и распределения ошибок.</a:t>
+            </a:r>
+          </a:p>
+        </p:txBody>
+      </p:sp>
+    </p:spTree>
+  </p:cSld>
+  <p:clrMapOvr>
+    <a:masterClrMapping/>
+  </p:clrMapOvr>
+</p:sld>
+</file>
+
+<file path=ppt/slides/slide3.xml><?xml version="1.0" encoding="utf-8"?>
+<p:sld xmlns:a="http://schemas.openxmlformats.org/drawingml/2006/main" xmlns:r="http://schemas.openxmlformats.org/officeDocument/2006/relationships" xmlns:p="http://schemas.openxmlformats.org/presentationml/2006/main">
+  <p:cSld>
+    <p:bg>
+      <p:bgPr>
+        <a:solidFill>
+          <a:srgbClr val="FFFFFF"/>
+        </a:solidFill>
+        <a:effectLst/>
+      </p:bgPr>
+    </p:bg>
+    <p:spTree>
+      <p:nvGrpSpPr>
+        <p:cNvPr id="1" name=""/>
+        <p:cNvGrpSpPr/>
+        <p:nvPr/>
+      </p:nvGrpSpPr>
+      <p:grpSpPr>
+        <a:xfrm>
+          <a:off x="0" y="0"/>
+          <a:ext cx="0" cy="0"/>
+          <a:chOff x="0" y="0"/>
+          <a:chExt cx="0" cy="0"/>
+        </a:xfrm>
+      </p:grpSpPr>
+      <p:sp>
+        <p:nvSpPr>
+          <p:cNvPr id="2" name="TextBox 1"/>
+          <p:cNvSpPr txBox="1"/>
+          <p:nvPr/>
+        </p:nvSpPr>
+        <p:spPr>
+          <a:xfrm>
+            <a:off x="411480" y="228600"/>
+            <a:ext cx="11338560" cy="502920"/>
+          </a:xfrm>
+          <a:prstGeom prst="rect">
+            <a:avLst/>
+          </a:prstGeom>
+          <a:noFill/>
+        </p:spPr>
+        <p:txBody>
+          <a:bodyPr wrap="square" lIns="13716" tIns="4572" rIns="13716" bIns="4572">
+            <a:spAutoFit/>
+          </a:bodyPr>
+          <a:lstStyle/>
+          <a:p>
+            <a:pPr>
+              <a:spcAft>
+                <a:spcPts val="200"/>
+              </a:spcAft>
+              <a:defRPr sz="2700" b="1">
+                <a:solidFill>
+                  <a:srgbClr val="193447"/>
+                </a:solidFill>
+                <a:latin typeface="Arial"/>
+              </a:defRPr>
+            </a:pPr>
+            <a:r>
+              <a:t>Как формировался ансамбль PTF</a:t>
+            </a:r>
+          </a:p>
+        </p:txBody>
+      </p:sp>
+      <p:sp>
+        <p:nvSpPr>
+          <p:cNvPr id="4" name="TextBox 3"/>
+          <p:cNvSpPr txBox="1"/>
+          <p:nvPr/>
+        </p:nvSpPr>
+        <p:spPr>
+          <a:xfrm>
+            <a:off x="11338560" y="6510528"/>
+            <a:ext cx="365760" cy="228600"/>
+          </a:xfrm>
+          <a:prstGeom prst="rect">
+            <a:avLst/>
+          </a:prstGeom>
+          <a:noFill/>
+        </p:spPr>
+        <p:txBody>
+          <a:bodyPr wrap="square" lIns="13716" tIns="4572" rIns="13716" bIns="4572">
+            <a:spAutoFit/>
+          </a:bodyPr>
+          <a:lstStyle/>
+          <a:p>
+            <a:pPr>
+              <a:spcAft>
+                <a:spcPts val="200"/>
+              </a:spcAft>
+              <a:defRPr sz="1100" b="0">
+                <a:solidFill>
+                  <a:srgbClr val="627482"/>
+                </a:solidFill>
+                <a:latin typeface="Arial"/>
+              </a:defRPr>
+            </a:pPr>
+            <a:r>
+              <a:t>3</a:t>
+            </a:r>
+          </a:p>
+        </p:txBody>
+      </p:sp>
+      <p:sp>
+        <p:nvSpPr>
+          <p:cNvPr id="5" name="TextBox 4"/>
+          <p:cNvSpPr txBox="1"/>
+          <p:nvPr/>
+        </p:nvSpPr>
+        <p:spPr>
+          <a:xfrm>
+            <a:off x="429768" y="868680"/>
+            <a:ext cx="11155680" cy="274320"/>
+          </a:xfrm>
+          <a:prstGeom prst="rect">
+            <a:avLst/>
+          </a:prstGeom>
+          <a:noFill/>
+        </p:spPr>
+        <p:txBody>
+          <a:bodyPr wrap="square" lIns="13716" tIns="4572" rIns="13716" bIns="4572">
+            <a:spAutoFit/>
+          </a:bodyPr>
+          <a:lstStyle/>
+          <a:p>
+            <a:pPr>
+              <a:spcAft>
+                <a:spcPts val="200"/>
+              </a:spcAft>
+              <a:defRPr sz="1500" b="0">
+                <a:solidFill>
+                  <a:srgbClr val="627482"/>
+                </a:solidFill>
+                <a:latin typeface="Arial"/>
+              </a:defRPr>
+            </a:pPr>
+            <a:r>
+              <a:t>Приложение • одинаковые образцы и точки • выбор состава без отложенных наблюдений</a:t>
+            </a:r>
+          </a:p>
+        </p:txBody>
+      </p:sp>
+      <p:sp>
+        <p:nvSpPr>
+          <p:cNvPr id="6" name="Rounded Rectangle 5"/>
+          <p:cNvSpPr/>
+          <p:nvPr/>
+        </p:nvSpPr>
+        <p:spPr>
+          <a:xfrm>
+            <a:off x="411480" y="1508760"/>
+            <a:ext cx="1709928" cy="960120"/>
+          </a:xfrm>
+          <a:prstGeom prst="roundRect">
+            <a:avLst>
+              <a:gd name="adj" fmla="val 8000"/>
+            </a:avLst>
+          </a:prstGeom>
+          <a:solidFill>
+            <a:srgbClr val="F0F6F7"/>
+          </a:solidFill>
+          <a:ln>
+            <a:noFill/>
+          </a:ln>
+        </p:spPr>
+        <p:style>
+          <a:lnRef idx="1">
+            <a:schemeClr val="accent1"/>
+          </a:lnRef>
+          <a:fillRef idx="3">
+            <a:schemeClr val="accent1"/>
+          </a:fillRef>
+          <a:effectRef idx="2">
+            <a:schemeClr val="accent1"/>
+          </a:effectRef>
+          <a:fontRef idx="minor">
+            <a:schemeClr val="lt1"/>
+          </a:fontRef>
+        </p:style>
+        <p:txBody>
+          <a:bodyPr rtlCol="0" anchor="ctr"/>
+          <a:lstStyle/>
+          <a:p>
+            <a:pPr algn="ctr"/>
+            <a:endParaRPr/>
+          </a:p>
+        </p:txBody>
+      </p:sp>
+      <p:sp>
+        <p:nvSpPr>
+          <p:cNvPr id="7" name="TextBox 6"/>
+          <p:cNvSpPr txBox="1"/>
+          <p:nvPr/>
+        </p:nvSpPr>
+        <p:spPr>
+          <a:xfrm>
+            <a:off x="502920" y="1746504"/>
+            <a:ext cx="1527048" cy="577595"/>
+          </a:xfrm>
+          <a:prstGeom prst="rect">
+            <a:avLst/>
+          </a:prstGeom>
+          <a:noFill/>
+        </p:spPr>
+        <p:txBody>
+          <a:bodyPr wrap="square" lIns="13716" tIns="4572" rIns="13716" bIns="4572">
+            <a:spAutoFit/>
+          </a:bodyPr>
+          <a:lstStyle/>
+          <a:p>
+            <a:pPr>
+              <a:spcAft>
+                <a:spcPts val="200"/>
+              </a:spcAft>
+              <a:defRPr sz="1700" b="1">
+                <a:solidFill>
+                  <a:srgbClr val="087F79"/>
+                </a:solidFill>
+                <a:latin typeface="Arial"/>
+              </a:defRPr>
+            </a:pPr>
+            <a:r>
+              <a:t>Отдельные</a:t>
+            </a:r>
+          </a:p>
+          <a:p>
+            <a:pPr>
+              <a:spcAft>
+                <a:spcPts val="200"/>
+              </a:spcAft>
+              <a:defRPr sz="1700" b="1">
+                <a:solidFill>
+                  <a:srgbClr val="087F79"/>
+                </a:solidFill>
+                <a:latin typeface="Arial"/>
+              </a:defRPr>
+            </a:pPr>
+            <a:r>
+              <a:t>PTF</a:t>
+            </a:r>
+          </a:p>
+        </p:txBody>
+      </p:sp>
+      <p:sp>
+        <p:nvSpPr>
+          <p:cNvPr id="8" name="Right Arrow 7"/>
+          <p:cNvSpPr/>
+          <p:nvPr/>
+        </p:nvSpPr>
+        <p:spPr>
+          <a:xfrm>
+            <a:off x="2157984" y="1938528"/>
+            <a:ext cx="155448" cy="155448"/>
+          </a:xfrm>
+          <a:prstGeom prst="rightArrow">
+            <a:avLst/>
+          </a:prstGeom>
+          <a:solidFill>
+            <a:srgbClr val="627482"/>
+          </a:solidFill>
+          <a:ln>
+            <a:noFill/>
+          </a:ln>
+        </p:spPr>
+        <p:style>
+          <a:lnRef idx="1">
+            <a:schemeClr val="accent1"/>
+          </a:lnRef>
+          <a:fillRef idx="3">
+            <a:schemeClr val="accent1"/>
+          </a:fillRef>
+          <a:effectRef idx="2">
+            <a:schemeClr val="accent1"/>
+          </a:effectRef>
+          <a:fontRef idx="minor">
+            <a:schemeClr val="lt1"/>
+          </a:fontRef>
+        </p:style>
+        <p:txBody>
+          <a:bodyPr rtlCol="0" anchor="ctr"/>
+          <a:lstStyle/>
+          <a:p>
+            <a:pPr algn="ctr"/>
+            <a:endParaRPr/>
+          </a:p>
+        </p:txBody>
+      </p:sp>
+      <p:sp>
+        <p:nvSpPr>
+          <p:cNvPr id="9" name="Rounded Rectangle 8"/>
+          <p:cNvSpPr/>
+          <p:nvPr/>
+        </p:nvSpPr>
+        <p:spPr>
+          <a:xfrm>
+            <a:off x="2350008" y="1508760"/>
+            <a:ext cx="1709928" cy="960120"/>
+          </a:xfrm>
+          <a:prstGeom prst="roundRect">
+            <a:avLst>
+              <a:gd name="adj" fmla="val 8000"/>
+            </a:avLst>
+          </a:prstGeom>
+          <a:solidFill>
+            <a:srgbClr val="F0F6F7"/>
+          </a:solidFill>
+          <a:ln>
+            <a:noFill/>
+          </a:ln>
+        </p:spPr>
+        <p:style>
+          <a:lnRef idx="1">
+            <a:schemeClr val="accent1"/>
+          </a:lnRef>
+          <a:fillRef idx="3">
+            <a:schemeClr val="accent1"/>
+          </a:fillRef>
+          <a:effectRef idx="2">
+            <a:schemeClr val="accent1"/>
+          </a:effectRef>
+          <a:fontRef idx="minor">
+            <a:schemeClr val="lt1"/>
+          </a:fontRef>
+        </p:style>
+        <p:txBody>
+          <a:bodyPr rtlCol="0" anchor="ctr"/>
+          <a:lstStyle/>
+          <a:p>
+            <a:pPr algn="ctr"/>
+            <a:endParaRPr/>
+          </a:p>
+        </p:txBody>
+      </p:sp>
+      <p:sp>
+        <p:nvSpPr>
+          <p:cNvPr id="10" name="TextBox 9"/>
+          <p:cNvSpPr txBox="1"/>
+          <p:nvPr/>
+        </p:nvSpPr>
+        <p:spPr>
+          <a:xfrm>
+            <a:off x="2441448" y="1746504"/>
+            <a:ext cx="1527048" cy="577595"/>
+          </a:xfrm>
+          <a:prstGeom prst="rect">
+            <a:avLst/>
+          </a:prstGeom>
+          <a:noFill/>
+        </p:spPr>
+        <p:txBody>
+          <a:bodyPr wrap="square" lIns="13716" tIns="4572" rIns="13716" bIns="4572">
+            <a:spAutoFit/>
+          </a:bodyPr>
+          <a:lstStyle/>
+          <a:p>
+            <a:pPr>
+              <a:spcAft>
+                <a:spcPts val="200"/>
+              </a:spcAft>
+              <a:defRPr sz="1700" b="1">
+                <a:solidFill>
+                  <a:srgbClr val="087F79"/>
+                </a:solidFill>
+                <a:latin typeface="Arial"/>
+              </a:defRPr>
+            </a:pPr>
+            <a:r>
+              <a:t>Одинаковая</a:t>
+            </a:r>
+          </a:p>
+          <a:p>
+            <a:pPr>
+              <a:spcAft>
+                <a:spcPts val="200"/>
+              </a:spcAft>
+              <a:defRPr sz="1700" b="1">
+                <a:solidFill>
+                  <a:srgbClr val="087F79"/>
+                </a:solidFill>
+                <a:latin typeface="Arial"/>
+              </a:defRPr>
+            </a:pPr>
+            <a:r>
+              <a:t>когорта</a:t>
+            </a:r>
+          </a:p>
+        </p:txBody>
+      </p:sp>
+      <p:sp>
+        <p:nvSpPr>
+          <p:cNvPr id="11" name="Right Arrow 10"/>
+          <p:cNvSpPr/>
+          <p:nvPr/>
+        </p:nvSpPr>
+        <p:spPr>
+          <a:xfrm>
+            <a:off x="4096512" y="1938528"/>
+            <a:ext cx="155448" cy="155448"/>
+          </a:xfrm>
+          <a:prstGeom prst="rightArrow">
+            <a:avLst/>
+          </a:prstGeom>
+          <a:solidFill>
+            <a:srgbClr val="627482"/>
+          </a:solidFill>
+          <a:ln>
+            <a:noFill/>
+          </a:ln>
+        </p:spPr>
+        <p:style>
+          <a:lnRef idx="1">
+            <a:schemeClr val="accent1"/>
+          </a:lnRef>
+          <a:fillRef idx="3">
+            <a:schemeClr val="accent1"/>
+          </a:fillRef>
+          <a:effectRef idx="2">
+            <a:schemeClr val="accent1"/>
+          </a:effectRef>
+          <a:fontRef idx="minor">
+            <a:schemeClr val="lt1"/>
+          </a:fontRef>
+        </p:style>
+        <p:txBody>
+          <a:bodyPr rtlCol="0" anchor="ctr"/>
+          <a:lstStyle/>
+          <a:p>
+            <a:pPr algn="ctr"/>
+            <a:endParaRPr/>
+          </a:p>
+        </p:txBody>
+      </p:sp>
+      <p:sp>
+        <p:nvSpPr>
+          <p:cNvPr id="12" name="Rounded Rectangle 11"/>
+          <p:cNvSpPr/>
+          <p:nvPr/>
+        </p:nvSpPr>
+        <p:spPr>
+          <a:xfrm>
+            <a:off x="4288536" y="1508760"/>
+            <a:ext cx="1709928" cy="960120"/>
+          </a:xfrm>
+          <a:prstGeom prst="roundRect">
+            <a:avLst>
+              <a:gd name="adj" fmla="val 8000"/>
+            </a:avLst>
+          </a:prstGeom>
+          <a:solidFill>
+            <a:srgbClr val="F0F6F7"/>
+          </a:solidFill>
+          <a:ln>
+            <a:noFill/>
+          </a:ln>
+        </p:spPr>
+        <p:style>
+          <a:lnRef idx="1">
+            <a:schemeClr val="accent1"/>
+          </a:lnRef>
+          <a:fillRef idx="3">
+            <a:schemeClr val="accent1"/>
+          </a:fillRef>
+          <a:effectRef idx="2">
+            <a:schemeClr val="accent1"/>
+          </a:effectRef>
+          <a:fontRef idx="minor">
+            <a:schemeClr val="lt1"/>
+          </a:fontRef>
+        </p:style>
+        <p:txBody>
+          <a:bodyPr rtlCol="0" anchor="ctr"/>
+          <a:lstStyle/>
+          <a:p>
+            <a:pPr algn="ctr"/>
+            <a:endParaRPr/>
+          </a:p>
+        </p:txBody>
+      </p:sp>
+      <p:sp>
+        <p:nvSpPr>
+          <p:cNvPr id="13" name="TextBox 12"/>
+          <p:cNvSpPr txBox="1"/>
+          <p:nvPr/>
+        </p:nvSpPr>
+        <p:spPr>
+          <a:xfrm>
+            <a:off x="4379976" y="1746504"/>
+            <a:ext cx="1527048" cy="577595"/>
+          </a:xfrm>
+          <a:prstGeom prst="rect">
+            <a:avLst/>
+          </a:prstGeom>
+          <a:noFill/>
+        </p:spPr>
+        <p:txBody>
+          <a:bodyPr wrap="square" lIns="13716" tIns="4572" rIns="13716" bIns="4572">
+            <a:spAutoFit/>
+          </a:bodyPr>
+          <a:lstStyle/>
+          <a:p>
+            <a:pPr>
+              <a:spcAft>
+                <a:spcPts val="200"/>
+              </a:spcAft>
+              <a:defRPr sz="1700" b="1">
+                <a:solidFill>
+                  <a:srgbClr val="087F79"/>
+                </a:solidFill>
+                <a:latin typeface="Arial"/>
+              </a:defRPr>
+            </a:pPr>
+            <a:r>
+              <a:t>Ранг PTF</a:t>
+            </a:r>
+          </a:p>
+          <a:p>
+            <a:pPr>
+              <a:spcAft>
+                <a:spcPts val="200"/>
+              </a:spcAft>
+              <a:defRPr sz="1700" b="1">
+                <a:solidFill>
+                  <a:srgbClr val="087F79"/>
+                </a:solidFill>
+                <a:latin typeface="Arial"/>
+              </a:defRPr>
+            </a:pPr>
+            <a:r>
+              <a:t>на обучении</a:t>
+            </a:r>
+          </a:p>
+        </p:txBody>
+      </p:sp>
+      <p:sp>
+        <p:nvSpPr>
+          <p:cNvPr id="14" name="Right Arrow 13"/>
+          <p:cNvSpPr/>
+          <p:nvPr/>
+        </p:nvSpPr>
+        <p:spPr>
+          <a:xfrm>
+            <a:off x="6035040" y="1938528"/>
+            <a:ext cx="155448" cy="155448"/>
+          </a:xfrm>
+          <a:prstGeom prst="rightArrow">
+            <a:avLst/>
+          </a:prstGeom>
+          <a:solidFill>
+            <a:srgbClr val="627482"/>
+          </a:solidFill>
+          <a:ln>
+            <a:noFill/>
+          </a:ln>
+        </p:spPr>
+        <p:style>
+          <a:lnRef idx="1">
+            <a:schemeClr val="accent1"/>
+          </a:lnRef>
+          <a:fillRef idx="3">
+            <a:schemeClr val="accent1"/>
+          </a:fillRef>
+          <a:effectRef idx="2">
+            <a:schemeClr val="accent1"/>
+          </a:effectRef>
+          <a:fontRef idx="minor">
+            <a:schemeClr val="lt1"/>
+          </a:fontRef>
+        </p:style>
+        <p:txBody>
+          <a:bodyPr rtlCol="0" anchor="ctr"/>
+          <a:lstStyle/>
+          <a:p>
+            <a:pPr algn="ctr"/>
+            <a:endParaRPr/>
+          </a:p>
+        </p:txBody>
+      </p:sp>
+      <p:sp>
+        <p:nvSpPr>
+          <p:cNvPr id="15" name="Rounded Rectangle 14"/>
+          <p:cNvSpPr/>
+          <p:nvPr/>
+        </p:nvSpPr>
+        <p:spPr>
+          <a:xfrm>
+            <a:off x="6227064" y="1508760"/>
+            <a:ext cx="1709928" cy="960120"/>
+          </a:xfrm>
+          <a:prstGeom prst="roundRect">
+            <a:avLst>
+              <a:gd name="adj" fmla="val 8000"/>
+            </a:avLst>
+          </a:prstGeom>
+          <a:solidFill>
+            <a:srgbClr val="F0F6F7"/>
+          </a:solidFill>
+          <a:ln>
+            <a:noFill/>
+          </a:ln>
+        </p:spPr>
+        <p:style>
+          <a:lnRef idx="1">
+            <a:schemeClr val="accent1"/>
+          </a:lnRef>
+          <a:fillRef idx="3">
+            <a:schemeClr val="accent1"/>
+          </a:fillRef>
+          <a:effectRef idx="2">
+            <a:schemeClr val="accent1"/>
+          </a:effectRef>
+          <a:fontRef idx="minor">
+            <a:schemeClr val="lt1"/>
+          </a:fontRef>
+        </p:style>
+        <p:txBody>
+          <a:bodyPr rtlCol="0" anchor="ctr"/>
+          <a:lstStyle/>
+          <a:p>
+            <a:pPr algn="ctr"/>
+            <a:endParaRPr/>
+          </a:p>
+        </p:txBody>
+      </p:sp>
+      <p:sp>
+        <p:nvSpPr>
+          <p:cNvPr id="16" name="TextBox 15"/>
+          <p:cNvSpPr txBox="1"/>
+          <p:nvPr/>
+        </p:nvSpPr>
+        <p:spPr>
+          <a:xfrm>
+            <a:off x="6318504" y="1746504"/>
+            <a:ext cx="1527048" cy="577595"/>
+          </a:xfrm>
+          <a:prstGeom prst="rect">
+            <a:avLst/>
+          </a:prstGeom>
+          <a:noFill/>
+        </p:spPr>
+        <p:txBody>
+          <a:bodyPr wrap="square" lIns="13716" tIns="4572" rIns="13716" bIns="4572">
+            <a:spAutoFit/>
+          </a:bodyPr>
+          <a:lstStyle/>
+          <a:p>
+            <a:pPr>
+              <a:spcAft>
+                <a:spcPts val="200"/>
+              </a:spcAft>
+              <a:defRPr sz="1700" b="1">
+                <a:solidFill>
+                  <a:srgbClr val="087F79"/>
+                </a:solidFill>
+                <a:latin typeface="Arial"/>
+              </a:defRPr>
+            </a:pPr>
+            <a:r>
+              <a:t>Выбор</a:t>
+            </a:r>
+          </a:p>
+          <a:p>
+            <a:pPr>
+              <a:spcAft>
+                <a:spcPts val="200"/>
+              </a:spcAft>
+              <a:defRPr sz="1700" b="1">
+                <a:solidFill>
+                  <a:srgbClr val="087F79"/>
+                </a:solidFill>
+                <a:latin typeface="Arial"/>
+              </a:defRPr>
+            </a:pPr>
+            <a:r>
+              <a:t>top-N</a:t>
+            </a:r>
+          </a:p>
+        </p:txBody>
+      </p:sp>
+      <p:sp>
+        <p:nvSpPr>
+          <p:cNvPr id="17" name="Right Arrow 16"/>
+          <p:cNvSpPr/>
+          <p:nvPr/>
+        </p:nvSpPr>
+        <p:spPr>
+          <a:xfrm>
+            <a:off x="7973568" y="1938528"/>
+            <a:ext cx="155448" cy="155448"/>
+          </a:xfrm>
+          <a:prstGeom prst="rightArrow">
+            <a:avLst/>
+          </a:prstGeom>
+          <a:solidFill>
+            <a:srgbClr val="627482"/>
+          </a:solidFill>
+          <a:ln>
+            <a:noFill/>
+          </a:ln>
+        </p:spPr>
+        <p:style>
+          <a:lnRef idx="1">
+            <a:schemeClr val="accent1"/>
+          </a:lnRef>
+          <a:fillRef idx="3">
+            <a:schemeClr val="accent1"/>
+          </a:fillRef>
+          <a:effectRef idx="2">
+            <a:schemeClr val="accent1"/>
+          </a:effectRef>
+          <a:fontRef idx="minor">
+            <a:schemeClr val="lt1"/>
+          </a:fontRef>
+        </p:style>
+        <p:txBody>
+          <a:bodyPr rtlCol="0" anchor="ctr"/>
+          <a:lstStyle/>
+          <a:p>
+            <a:pPr algn="ctr"/>
+            <a:endParaRPr/>
+          </a:p>
+        </p:txBody>
+      </p:sp>
+      <p:sp>
+        <p:nvSpPr>
+          <p:cNvPr id="18" name="Rounded Rectangle 17"/>
+          <p:cNvSpPr/>
+          <p:nvPr/>
+        </p:nvSpPr>
+        <p:spPr>
+          <a:xfrm>
+            <a:off x="8165592" y="1508760"/>
+            <a:ext cx="1709928" cy="960120"/>
+          </a:xfrm>
+          <a:prstGeom prst="roundRect">
+            <a:avLst>
+              <a:gd name="adj" fmla="val 8000"/>
+            </a:avLst>
+          </a:prstGeom>
+          <a:solidFill>
+            <a:srgbClr val="F0F6F7"/>
+          </a:solidFill>
+          <a:ln>
+            <a:noFill/>
+          </a:ln>
+        </p:spPr>
+        <p:style>
+          <a:lnRef idx="1">
+            <a:schemeClr val="accent1"/>
+          </a:lnRef>
+          <a:fillRef idx="3">
+            <a:schemeClr val="accent1"/>
+          </a:fillRef>
+          <a:effectRef idx="2">
+            <a:schemeClr val="accent1"/>
+          </a:effectRef>
+          <a:fontRef idx="minor">
+            <a:schemeClr val="lt1"/>
+          </a:fontRef>
+        </p:style>
+        <p:txBody>
+          <a:bodyPr rtlCol="0" anchor="ctr"/>
+          <a:lstStyle/>
+          <a:p>
+            <a:pPr algn="ctr"/>
+            <a:endParaRPr/>
+          </a:p>
+        </p:txBody>
+      </p:sp>
+      <p:sp>
+        <p:nvSpPr>
+          <p:cNvPr id="19" name="TextBox 18"/>
+          <p:cNvSpPr txBox="1"/>
+          <p:nvPr/>
+        </p:nvSpPr>
+        <p:spPr>
+          <a:xfrm>
+            <a:off x="8257031" y="1746504"/>
+            <a:ext cx="1527048" cy="577595"/>
+          </a:xfrm>
+          <a:prstGeom prst="rect">
+            <a:avLst/>
+          </a:prstGeom>
+          <a:noFill/>
+        </p:spPr>
+        <p:txBody>
+          <a:bodyPr wrap="square" lIns="13716" tIns="4572" rIns="13716" bIns="4572">
+            <a:spAutoFit/>
+          </a:bodyPr>
+          <a:lstStyle/>
+          <a:p>
+            <a:pPr>
+              <a:spcAft>
+                <a:spcPts val="200"/>
+              </a:spcAft>
+              <a:defRPr sz="1700" b="1">
+                <a:solidFill>
+                  <a:srgbClr val="087F79"/>
+                </a:solidFill>
+                <a:latin typeface="Arial"/>
+              </a:defRPr>
+            </a:pPr>
+            <a:r>
+              <a:t>Среднее</a:t>
+            </a:r>
+          </a:p>
+          <a:p>
+            <a:pPr>
+              <a:spcAft>
+                <a:spcPts val="200"/>
+              </a:spcAft>
+              <a:defRPr sz="1700" b="1">
+                <a:solidFill>
+                  <a:srgbClr val="087F79"/>
+                </a:solidFill>
+                <a:latin typeface="Arial"/>
+              </a:defRPr>
+            </a:pPr>
+            <a:r>
+              <a:t>прогнозов</a:t>
+            </a:r>
+          </a:p>
+        </p:txBody>
+      </p:sp>
+      <p:sp>
+        <p:nvSpPr>
+          <p:cNvPr id="20" name="Right Arrow 19"/>
+          <p:cNvSpPr/>
+          <p:nvPr/>
+        </p:nvSpPr>
+        <p:spPr>
+          <a:xfrm>
+            <a:off x="9912096" y="1938528"/>
+            <a:ext cx="155448" cy="155448"/>
+          </a:xfrm>
+          <a:prstGeom prst="rightArrow">
+            <a:avLst/>
+          </a:prstGeom>
+          <a:solidFill>
+            <a:srgbClr val="627482"/>
+          </a:solidFill>
+          <a:ln>
+            <a:noFill/>
+          </a:ln>
+        </p:spPr>
+        <p:style>
+          <a:lnRef idx="1">
+            <a:schemeClr val="accent1"/>
+          </a:lnRef>
+          <a:fillRef idx="3">
+            <a:schemeClr val="accent1"/>
+          </a:fillRef>
+          <a:effectRef idx="2">
+            <a:schemeClr val="accent1"/>
+          </a:effectRef>
+          <a:fontRef idx="minor">
+            <a:schemeClr val="lt1"/>
+          </a:fontRef>
+        </p:style>
+        <p:txBody>
+          <a:bodyPr rtlCol="0" anchor="ctr"/>
+          <a:lstStyle/>
+          <a:p>
+            <a:pPr algn="ctr"/>
+            <a:endParaRPr/>
+          </a:p>
+        </p:txBody>
+      </p:sp>
+      <p:sp>
+        <p:nvSpPr>
+          <p:cNvPr id="21" name="Rounded Rectangle 20"/>
+          <p:cNvSpPr/>
+          <p:nvPr/>
+        </p:nvSpPr>
+        <p:spPr>
+          <a:xfrm>
+            <a:off x="10104120" y="1508760"/>
+            <a:ext cx="1709928" cy="960120"/>
+          </a:xfrm>
+          <a:prstGeom prst="roundRect">
+            <a:avLst>
+              <a:gd name="adj" fmla="val 8000"/>
+            </a:avLst>
+          </a:prstGeom>
+          <a:solidFill>
+            <a:srgbClr val="F0F6F7"/>
+          </a:solidFill>
+          <a:ln>
+            <a:noFill/>
+          </a:ln>
+        </p:spPr>
+        <p:style>
+          <a:lnRef idx="1">
+            <a:schemeClr val="accent1"/>
+          </a:lnRef>
+          <a:fillRef idx="3">
+            <a:schemeClr val="accent1"/>
+          </a:fillRef>
+          <a:effectRef idx="2">
+            <a:schemeClr val="accent1"/>
+          </a:effectRef>
+          <a:fontRef idx="minor">
+            <a:schemeClr val="lt1"/>
+          </a:fontRef>
+        </p:style>
+        <p:txBody>
+          <a:bodyPr rtlCol="0" anchor="ctr"/>
+          <a:lstStyle/>
+          <a:p>
+            <a:pPr algn="ctr"/>
+            <a:endParaRPr/>
+          </a:p>
+        </p:txBody>
+      </p:sp>
+      <p:sp>
+        <p:nvSpPr>
+          <p:cNvPr id="22" name="TextBox 21"/>
+          <p:cNvSpPr txBox="1"/>
+          <p:nvPr/>
+        </p:nvSpPr>
+        <p:spPr>
+          <a:xfrm>
+            <a:off x="10195560" y="1746504"/>
+            <a:ext cx="1527048" cy="577595"/>
+          </a:xfrm>
+          <a:prstGeom prst="rect">
+            <a:avLst/>
+          </a:prstGeom>
+          <a:noFill/>
+        </p:spPr>
+        <p:txBody>
+          <a:bodyPr wrap="square" lIns="13716" tIns="4572" rIns="13716" bIns="4572">
+            <a:spAutoFit/>
+          </a:bodyPr>
+          <a:lstStyle/>
+          <a:p>
+            <a:pPr>
+              <a:spcAft>
+                <a:spcPts val="200"/>
+              </a:spcAft>
+              <a:defRPr sz="1700" b="1">
+                <a:solidFill>
+                  <a:srgbClr val="087F79"/>
+                </a:solidFill>
+                <a:latin typeface="Arial"/>
+              </a:defRPr>
+            </a:pPr>
+            <a:r>
+              <a:t>Проверка</a:t>
+            </a:r>
+          </a:p>
+          <a:p>
+            <a:pPr>
+              <a:spcAft>
+                <a:spcPts val="200"/>
+              </a:spcAft>
+              <a:defRPr sz="1700" b="1">
+                <a:solidFill>
+                  <a:srgbClr val="087F79"/>
+                </a:solidFill>
+                <a:latin typeface="Arial"/>
+              </a:defRPr>
+            </a:pPr>
+            <a:r>
+              <a:t>на held-out</a:t>
+            </a:r>
+          </a:p>
+        </p:txBody>
+      </p:sp>
+      <p:sp>
+        <p:nvSpPr>
+          <p:cNvPr id="23" name="TextBox 22"/>
+          <p:cNvSpPr txBox="1"/>
+          <p:nvPr/>
+        </p:nvSpPr>
+        <p:spPr>
+          <a:xfrm>
+            <a:off x="548640" y="2871216"/>
+            <a:ext cx="11064240" cy="429768"/>
+          </a:xfrm>
+          <a:prstGeom prst="rect">
+            <a:avLst/>
+          </a:prstGeom>
+          <a:noFill/>
+        </p:spPr>
+        <p:txBody>
+          <a:bodyPr wrap="square" lIns="13716" tIns="4572" rIns="13716" bIns="4572">
+            <a:spAutoFit/>
+          </a:bodyPr>
+          <a:lstStyle/>
+          <a:p>
+            <a:pPr>
+              <a:spcAft>
+                <a:spcPts val="200"/>
+              </a:spcAft>
+              <a:defRPr sz="2500" b="1">
+                <a:solidFill>
+                  <a:srgbClr val="087F79"/>
+                </a:solidFill>
+                <a:latin typeface="Arial"/>
+              </a:defRPr>
+            </a:pPr>
+            <a:r>
+              <a:t>Прогноз top-N = сумма прогнозов выбранных PTF / N</a:t>
+            </a:r>
+          </a:p>
+        </p:txBody>
+      </p:sp>
+      <p:sp>
+        <p:nvSpPr>
+          <p:cNvPr id="24" name="TextBox 23"/>
+          <p:cNvSpPr txBox="1"/>
+          <p:nvPr/>
+        </p:nvSpPr>
+        <p:spPr>
+          <a:xfrm>
+            <a:off x="548640" y="3547872"/>
+            <a:ext cx="10972800" cy="577595"/>
+          </a:xfrm>
+          <a:prstGeom prst="rect">
+            <a:avLst/>
+          </a:prstGeom>
+          <a:noFill/>
+        </p:spPr>
+        <p:txBody>
+          <a:bodyPr wrap="square" lIns="13716" tIns="4572" rIns="13716" bIns="4572">
+            <a:spAutoFit/>
+          </a:bodyPr>
+          <a:lstStyle/>
+          <a:p>
+            <a:pPr>
+              <a:spcAft>
+                <a:spcPts val="200"/>
+              </a:spcAft>
+              <a:defRPr sz="1700" b="0">
+                <a:solidFill>
+                  <a:srgbClr val="193447"/>
+                </a:solidFill>
+                <a:latin typeface="Arial"/>
+              </a:defRPr>
+            </a:pPr>
+            <a:r>
+              <a:t>Top-5: Clapp1978 + Varallyai1982 chernozem A, B, C и meadow.</a:t>
+            </a:r>
+          </a:p>
+          <a:p>
+            <a:pPr>
+              <a:spcAft>
+                <a:spcPts val="200"/>
+              </a:spcAft>
+              <a:defRPr sz="1700" b="0">
+                <a:solidFill>
+                  <a:srgbClr val="193447"/>
+                </a:solidFill>
+                <a:latin typeface="Arial"/>
+              </a:defRPr>
+            </a:pPr>
+            <a:r>
+              <a:t>При каждой held-out проверке выбор моделей повторяется только на обучающей части.</a:t>
+            </a:r>
+          </a:p>
+        </p:txBody>
+      </p:sp>
+      <p:sp>
+        <p:nvSpPr>
+          <p:cNvPr id="25" name="Rounded Rectangle 24"/>
+          <p:cNvSpPr/>
+          <p:nvPr/>
+        </p:nvSpPr>
+        <p:spPr>
+          <a:xfrm>
+            <a:off x="411480" y="4315968"/>
+            <a:ext cx="5504688" cy="1234440"/>
+          </a:xfrm>
+          <a:prstGeom prst="roundRect">
+            <a:avLst>
+              <a:gd name="adj" fmla="val 8000"/>
+            </a:avLst>
+          </a:prstGeom>
+          <a:solidFill>
+            <a:srgbClr val="F0F6F7"/>
+          </a:solidFill>
+          <a:ln>
+            <a:noFill/>
+          </a:ln>
+        </p:spPr>
+        <p:style>
+          <a:lnRef idx="1">
+            <a:schemeClr val="accent1"/>
+          </a:lnRef>
+          <a:fillRef idx="3">
+            <a:schemeClr val="accent1"/>
+          </a:fillRef>
+          <a:effectRef idx="2">
+            <a:schemeClr val="accent1"/>
+          </a:effectRef>
+          <a:fontRef idx="minor">
+            <a:schemeClr val="lt1"/>
+          </a:fontRef>
+        </p:style>
+        <p:txBody>
+          <a:bodyPr rtlCol="0" anchor="ctr"/>
+          <a:lstStyle/>
+          <a:p>
+            <a:pPr algn="ctr"/>
+            <a:endParaRPr/>
+          </a:p>
+        </p:txBody>
+      </p:sp>
+      <p:sp>
+        <p:nvSpPr>
+          <p:cNvPr id="26" name="Rounded Rectangle 25"/>
+          <p:cNvSpPr/>
+          <p:nvPr/>
+        </p:nvSpPr>
+        <p:spPr>
+          <a:xfrm>
+            <a:off x="6263640" y="4315968"/>
+            <a:ext cx="5504688" cy="1234440"/>
+          </a:xfrm>
+          <a:prstGeom prst="roundRect">
+            <a:avLst>
+              <a:gd name="adj" fmla="val 8000"/>
+            </a:avLst>
+          </a:prstGeom>
+          <a:solidFill>
+            <a:srgbClr val="F0F6F7"/>
+          </a:solidFill>
+          <a:ln>
+            <a:noFill/>
+          </a:ln>
+        </p:spPr>
+        <p:style>
+          <a:lnRef idx="1">
+            <a:schemeClr val="accent1"/>
+          </a:lnRef>
+          <a:fillRef idx="3">
+            <a:schemeClr val="accent1"/>
+          </a:fillRef>
+          <a:effectRef idx="2">
+            <a:schemeClr val="accent1"/>
+          </a:effectRef>
+          <a:fontRef idx="minor">
+            <a:schemeClr val="lt1"/>
+          </a:fontRef>
+        </p:style>
+        <p:txBody>
+          <a:bodyPr rtlCol="0" anchor="ctr"/>
+          <a:lstStyle/>
+          <a:p>
+            <a:pPr algn="ctr"/>
+            <a:endParaRPr/>
+          </a:p>
+        </p:txBody>
+      </p:sp>
+      <p:sp>
+        <p:nvSpPr>
+          <p:cNvPr id="27" name="TextBox 26"/>
+          <p:cNvSpPr txBox="1"/>
+          <p:nvPr/>
+        </p:nvSpPr>
+        <p:spPr>
+          <a:xfrm>
+            <a:off x="621792" y="4480560"/>
+            <a:ext cx="5029200" cy="304292"/>
+          </a:xfrm>
+          <a:prstGeom prst="rect">
+            <a:avLst/>
+          </a:prstGeom>
+          <a:noFill/>
+        </p:spPr>
+        <p:txBody>
+          <a:bodyPr wrap="square" lIns="13716" tIns="4572" rIns="13716" bIns="4572">
+            <a:spAutoFit/>
+          </a:bodyPr>
+          <a:lstStyle/>
+          <a:p>
+            <a:pPr>
+              <a:spcAft>
+                <a:spcPts val="200"/>
+              </a:spcAft>
+              <a:defRPr sz="1800" b="1">
+                <a:solidFill>
+                  <a:srgbClr val="193447"/>
+                </a:solidFill>
+                <a:latin typeface="Arial"/>
+              </a:defRPr>
+            </a:pPr>
+            <a:r>
+              <a:t>Критерий устойчивости</a:t>
+            </a:r>
+          </a:p>
+        </p:txBody>
+      </p:sp>
+      <p:sp>
+        <p:nvSpPr>
+          <p:cNvPr id="28" name="TextBox 27"/>
+          <p:cNvSpPr txBox="1"/>
+          <p:nvPr/>
+        </p:nvSpPr>
+        <p:spPr>
+          <a:xfrm>
+            <a:off x="621792" y="4937760"/>
+            <a:ext cx="5029200" cy="515620"/>
+          </a:xfrm>
+          <a:prstGeom prst="rect">
+            <a:avLst/>
+          </a:prstGeom>
+          <a:noFill/>
+        </p:spPr>
+        <p:txBody>
+          <a:bodyPr wrap="square" lIns="13716" tIns="4572" rIns="13716" bIns="4572">
+            <a:spAutoFit/>
+          </a:bodyPr>
+          <a:lstStyle/>
+          <a:p>
+            <a:pPr>
+              <a:spcAft>
+                <a:spcPts val="200"/>
+              </a:spcAft>
+              <a:defRPr sz="1500" b="0">
+                <a:solidFill>
+                  <a:srgbClr val="193447"/>
+                </a:solidFill>
+                <a:latin typeface="Arial"/>
+              </a:defRPr>
+            </a:pPr>
+            <a:r>
+              <a:t>Снижение pooled RMSE ≥1% и меньшая ошибка</a:t>
+            </a:r>
+          </a:p>
+          <a:p>
+            <a:pPr>
+              <a:spcAft>
+                <a:spcPts val="200"/>
+              </a:spcAft>
+              <a:defRPr sz="1500" b="0">
+                <a:solidFill>
+                  <a:srgbClr val="193447"/>
+                </a:solidFill>
+                <a:latin typeface="Arial"/>
+              </a:defRPr>
+            </a:pPr>
+            <a:r>
+              <a:t>во всех предусмотренных held-out проверках.</a:t>
+            </a:r>
+          </a:p>
+        </p:txBody>
+      </p:sp>
+      <p:sp>
+        <p:nvSpPr>
+          <p:cNvPr id="29" name="TextBox 28"/>
+          <p:cNvSpPr txBox="1"/>
+          <p:nvPr/>
+        </p:nvSpPr>
+        <p:spPr>
+          <a:xfrm>
+            <a:off x="6473952" y="4480560"/>
+            <a:ext cx="5029200" cy="304292"/>
+          </a:xfrm>
+          <a:prstGeom prst="rect">
+            <a:avLst/>
+          </a:prstGeom>
+          <a:noFill/>
+        </p:spPr>
+        <p:txBody>
+          <a:bodyPr wrap="square" lIns="13716" tIns="4572" rIns="13716" bIns="4572">
+            <a:spAutoFit/>
+          </a:bodyPr>
+          <a:lstStyle/>
+          <a:p>
+            <a:pPr>
+              <a:spcAft>
+                <a:spcPts val="200"/>
+              </a:spcAft>
+              <a:defRPr sz="1800" b="1">
+                <a:solidFill>
+                  <a:srgbClr val="193447"/>
+                </a:solidFill>
+                <a:latin typeface="Arial"/>
+              </a:defRPr>
+            </a:pPr>
+            <a:r>
+              <a:t>Два ориентира для сравнения</a:t>
+            </a:r>
+          </a:p>
+        </p:txBody>
+      </p:sp>
+      <p:sp>
+        <p:nvSpPr>
+          <p:cNvPr id="30" name="TextBox 29"/>
+          <p:cNvSpPr txBox="1"/>
+          <p:nvPr/>
+        </p:nvSpPr>
+        <p:spPr>
+          <a:xfrm>
+            <a:off x="6473952" y="4937760"/>
+            <a:ext cx="5029200" cy="515620"/>
+          </a:xfrm>
+          <a:prstGeom prst="rect">
+            <a:avLst/>
+          </a:prstGeom>
+          <a:noFill/>
+        </p:spPr>
+        <p:txBody>
+          <a:bodyPr wrap="square" lIns="13716" tIns="4572" rIns="13716" bIns="4572">
+            <a:spAutoFit/>
+          </a:bodyPr>
+          <a:lstStyle/>
+          <a:p>
+            <a:pPr>
+              <a:spcAft>
+                <a:spcPts val="200"/>
+              </a:spcAft>
+              <a:defRPr sz="1500" b="0">
+                <a:solidFill>
+                  <a:srgbClr val="193447"/>
+                </a:solidFill>
+                <a:latin typeface="Arial"/>
+              </a:defRPr>
+            </a:pPr>
+            <a:r>
+              <a:t>Лучшая индивидуальная PTF на обучении</a:t>
+            </a:r>
+          </a:p>
+          <a:p>
+            <a:pPr>
+              <a:spcAft>
+                <a:spcPts val="200"/>
+              </a:spcAft>
+              <a:defRPr sz="1500" b="0">
+                <a:solidFill>
+                  <a:srgbClr val="193447"/>
+                </a:solidFill>
+                <a:latin typeface="Arial"/>
+              </a:defRPr>
+            </a:pPr>
+            <a:r>
+              <a:t>и лучшая индивидуальная PTF полной когорты.</a:t>
             </a:r>
           </a:p>
         </p:txBody>
